--- a/Schedules 1.pptx
+++ b/Schedules 1.pptx
@@ -7,12 +7,14 @@
   <p:sldIdLst>
     <p:sldId id="256" r:id="rId2"/>
     <p:sldId id="260" r:id="rId3"/>
-    <p:sldId id="257" r:id="rId4"/>
-    <p:sldId id="258" r:id="rId5"/>
-    <p:sldId id="259" r:id="rId6"/>
-    <p:sldId id="263" r:id="rId7"/>
-    <p:sldId id="262" r:id="rId8"/>
-    <p:sldId id="261" r:id="rId9"/>
+    <p:sldId id="265" r:id="rId4"/>
+    <p:sldId id="257" r:id="rId5"/>
+    <p:sldId id="258" r:id="rId6"/>
+    <p:sldId id="259" r:id="rId7"/>
+    <p:sldId id="264" r:id="rId8"/>
+    <p:sldId id="263" r:id="rId9"/>
+    <p:sldId id="262" r:id="rId10"/>
+    <p:sldId id="261" r:id="rId11"/>
   </p:sldIdLst>
   <p:sldSz cx="12192000" cy="6858000"/>
   <p:notesSz cx="6858000" cy="9144000"/>
@@ -111,7 +113,174 @@
       </a:defRPr>
     </a:lvl9pPr>
   </p:defaultTextStyle>
+  <p:extLst>
+    <p:ext uri="{EFAFB233-063F-42B5-8137-9DF3F51BA10A}">
+      <p15:sldGuideLst xmlns:p15="http://schemas.microsoft.com/office/powerpoint/2012/main"/>
+    </p:ext>
+  </p:extLst>
 </p:presentation>
+</file>
+
+<file path=ppt/revisionInfo.xml><?xml version="1.0" encoding="utf-8"?>
+<p1510:revInfo xmlns:a="http://schemas.openxmlformats.org/drawingml/2006/main" xmlns:r="http://schemas.openxmlformats.org/officeDocument/2006/relationships" xmlns:p1510="http://schemas.microsoft.com/office/powerpoint/2015/10/main">
+  <p1510:revLst>
+    <p1510:client id="{3BAABB8E-965C-4469-B16F-F6ECC8812E6B}" v="1" dt="2025-11-24T11:40:50.413"/>
+  </p1510:revLst>
+</p1510:revInfo>
+</file>
+
+<file path=ppt/changesInfos/changesInfo1.xml><?xml version="1.0" encoding="utf-8"?>
+<pc:chgInfo xmlns:a="http://schemas.openxmlformats.org/drawingml/2006/main" xmlns:r="http://schemas.openxmlformats.org/officeDocument/2006/relationships" xmlns:ac="http://schemas.microsoft.com/office/drawing/2013/main/command" xmlns:pc="http://schemas.microsoft.com/office/powerpoint/2013/main/command">
+  <pc:docChgLst>
+    <pc:chgData name="Iker Joaquín" userId="acaffbe4a706a9d4" providerId="LiveId" clId="{D1DFD0CF-3B6A-4A93-9F8B-FF939B2F1C04}"/>
+    <pc:docChg chg="undo custSel addSld modSld sldOrd">
+      <pc:chgData name="Iker Joaquín" userId="acaffbe4a706a9d4" providerId="LiveId" clId="{D1DFD0CF-3B6A-4A93-9F8B-FF939B2F1C04}" dt="2025-11-24T11:43:31.312" v="107"/>
+      <pc:docMkLst>
+        <pc:docMk/>
+      </pc:docMkLst>
+      <pc:sldChg chg="addSp">
+        <pc:chgData name="Iker Joaquín" userId="acaffbe4a706a9d4" providerId="LiveId" clId="{D1DFD0CF-3B6A-4A93-9F8B-FF939B2F1C04}" dt="2025-11-24T11:40:50.413" v="4"/>
+        <pc:sldMkLst>
+          <pc:docMk/>
+          <pc:sldMk cId="2559727546" sldId="259"/>
+        </pc:sldMkLst>
+        <pc:picChg chg="add">
+          <ac:chgData name="Iker Joaquín" userId="acaffbe4a706a9d4" providerId="LiveId" clId="{D1DFD0CF-3B6A-4A93-9F8B-FF939B2F1C04}" dt="2025-11-24T11:40:50.413" v="4"/>
+          <ac:picMkLst>
+            <pc:docMk/>
+            <pc:sldMk cId="2559727546" sldId="259"/>
+            <ac:picMk id="3" creationId="{70FE3505-2832-17D5-FAA4-5C84D05B3612}"/>
+          </ac:picMkLst>
+        </pc:picChg>
+      </pc:sldChg>
+      <pc:sldChg chg="modSp mod">
+        <pc:chgData name="Iker Joaquín" userId="acaffbe4a706a9d4" providerId="LiveId" clId="{D1DFD0CF-3B6A-4A93-9F8B-FF939B2F1C04}" dt="2025-11-24T11:40:42.530" v="3" actId="1076"/>
+        <pc:sldMkLst>
+          <pc:docMk/>
+          <pc:sldMk cId="156025415" sldId="263"/>
+        </pc:sldMkLst>
+        <pc:spChg chg="mod">
+          <ac:chgData name="Iker Joaquín" userId="acaffbe4a706a9d4" providerId="LiveId" clId="{D1DFD0CF-3B6A-4A93-9F8B-FF939B2F1C04}" dt="2025-11-24T11:40:30.689" v="0" actId="20577"/>
+          <ac:spMkLst>
+            <pc:docMk/>
+            <pc:sldMk cId="156025415" sldId="263"/>
+            <ac:spMk id="2" creationId="{00000000-0000-0000-0000-000000000000}"/>
+          </ac:spMkLst>
+        </pc:spChg>
+        <pc:picChg chg="mod">
+          <ac:chgData name="Iker Joaquín" userId="acaffbe4a706a9d4" providerId="LiveId" clId="{D1DFD0CF-3B6A-4A93-9F8B-FF939B2F1C04}" dt="2025-11-24T11:40:42.530" v="3" actId="1076"/>
+          <ac:picMkLst>
+            <pc:docMk/>
+            <pc:sldMk cId="156025415" sldId="263"/>
+            <ac:picMk id="4" creationId="{00000000-0000-0000-0000-000000000000}"/>
+          </ac:picMkLst>
+        </pc:picChg>
+      </pc:sldChg>
+      <pc:sldChg chg="addSp delSp modSp add mod ord setBg">
+        <pc:chgData name="Iker Joaquín" userId="acaffbe4a706a9d4" providerId="LiveId" clId="{D1DFD0CF-3B6A-4A93-9F8B-FF939B2F1C04}" dt="2025-11-24T11:42:04.301" v="31" actId="26606"/>
+        <pc:sldMkLst>
+          <pc:docMk/>
+          <pc:sldMk cId="2948255022" sldId="264"/>
+        </pc:sldMkLst>
+        <pc:spChg chg="mod">
+          <ac:chgData name="Iker Joaquín" userId="acaffbe4a706a9d4" providerId="LiveId" clId="{D1DFD0CF-3B6A-4A93-9F8B-FF939B2F1C04}" dt="2025-11-24T11:42:04.301" v="31" actId="26606"/>
+          <ac:spMkLst>
+            <pc:docMk/>
+            <pc:sldMk cId="2948255022" sldId="264"/>
+            <ac:spMk id="2" creationId="{833D3A3F-DE7C-C301-BA9A-40CCD22C666D}"/>
+          </ac:spMkLst>
+        </pc:spChg>
+        <pc:spChg chg="add del mod">
+          <ac:chgData name="Iker Joaquín" userId="acaffbe4a706a9d4" providerId="LiveId" clId="{D1DFD0CF-3B6A-4A93-9F8B-FF939B2F1C04}" dt="2025-11-24T11:41:55.166" v="27" actId="22"/>
+          <ac:spMkLst>
+            <pc:docMk/>
+            <pc:sldMk cId="2948255022" sldId="264"/>
+            <ac:spMk id="5" creationId="{AFCB96BA-EBE3-8010-B168-E450D6708830}"/>
+          </ac:spMkLst>
+        </pc:spChg>
+        <pc:spChg chg="add">
+          <ac:chgData name="Iker Joaquín" userId="acaffbe4a706a9d4" providerId="LiveId" clId="{D1DFD0CF-3B6A-4A93-9F8B-FF939B2F1C04}" dt="2025-11-24T11:42:04.301" v="31" actId="26606"/>
+          <ac:spMkLst>
+            <pc:docMk/>
+            <pc:sldMk cId="2948255022" sldId="264"/>
+            <ac:spMk id="14" creationId="{022BDE4A-8A20-4A69-9C5A-581C82036A4D}"/>
+          </ac:spMkLst>
+        </pc:spChg>
+        <pc:picChg chg="del">
+          <ac:chgData name="Iker Joaquín" userId="acaffbe4a706a9d4" providerId="LiveId" clId="{D1DFD0CF-3B6A-4A93-9F8B-FF939B2F1C04}" dt="2025-11-24T11:41:02.791" v="8" actId="478"/>
+          <ac:picMkLst>
+            <pc:docMk/>
+            <pc:sldMk cId="2948255022" sldId="264"/>
+            <ac:picMk id="4" creationId="{D967A8F6-5249-C863-76B4-61660697638C}"/>
+          </ac:picMkLst>
+        </pc:picChg>
+        <pc:picChg chg="add mod">
+          <ac:chgData name="Iker Joaquín" userId="acaffbe4a706a9d4" providerId="LiveId" clId="{D1DFD0CF-3B6A-4A93-9F8B-FF939B2F1C04}" dt="2025-11-24T11:42:04.301" v="31" actId="26606"/>
+          <ac:picMkLst>
+            <pc:docMk/>
+            <pc:sldMk cId="2948255022" sldId="264"/>
+            <ac:picMk id="7" creationId="{0FBF5F8E-8772-5A2D-7036-36CC5F7A5DDC}"/>
+          </ac:picMkLst>
+        </pc:picChg>
+        <pc:picChg chg="add mod ord">
+          <ac:chgData name="Iker Joaquín" userId="acaffbe4a706a9d4" providerId="LiveId" clId="{D1DFD0CF-3B6A-4A93-9F8B-FF939B2F1C04}" dt="2025-11-24T11:42:04.301" v="31" actId="26606"/>
+          <ac:picMkLst>
+            <pc:docMk/>
+            <pc:sldMk cId="2948255022" sldId="264"/>
+            <ac:picMk id="9" creationId="{E2E043D0-5080-A83B-1219-A05981200FEB}"/>
+          </ac:picMkLst>
+        </pc:picChg>
+      </pc:sldChg>
+      <pc:sldChg chg="addSp delSp modSp add mod ord">
+        <pc:chgData name="Iker Joaquín" userId="acaffbe4a706a9d4" providerId="LiveId" clId="{D1DFD0CF-3B6A-4A93-9F8B-FF939B2F1C04}" dt="2025-11-24T11:43:31.312" v="107"/>
+        <pc:sldMkLst>
+          <pc:docMk/>
+          <pc:sldMk cId="2360420157" sldId="265"/>
+        </pc:sldMkLst>
+        <pc:spChg chg="mod">
+          <ac:chgData name="Iker Joaquín" userId="acaffbe4a706a9d4" providerId="LiveId" clId="{D1DFD0CF-3B6A-4A93-9F8B-FF939B2F1C04}" dt="2025-11-24T11:43:06.178" v="101" actId="20577"/>
+          <ac:spMkLst>
+            <pc:docMk/>
+            <pc:sldMk cId="2360420157" sldId="265"/>
+            <ac:spMk id="2" creationId="{DA87C2A9-410E-C863-BF7A-820E45945E70}"/>
+          </ac:spMkLst>
+        </pc:spChg>
+        <pc:spChg chg="add mod">
+          <ac:chgData name="Iker Joaquín" userId="acaffbe4a706a9d4" providerId="LiveId" clId="{D1DFD0CF-3B6A-4A93-9F8B-FF939B2F1C04}" dt="2025-11-24T11:43:08.179" v="102" actId="478"/>
+          <ac:spMkLst>
+            <pc:docMk/>
+            <pc:sldMk cId="2360420157" sldId="265"/>
+            <ac:spMk id="4" creationId="{8B59B3E3-153C-407E-8FE3-3BBA417EDE79}"/>
+          </ac:spMkLst>
+        </pc:spChg>
+        <pc:picChg chg="add mod">
+          <ac:chgData name="Iker Joaquín" userId="acaffbe4a706a9d4" providerId="LiveId" clId="{D1DFD0CF-3B6A-4A93-9F8B-FF939B2F1C04}" dt="2025-11-24T11:43:17.452" v="105" actId="1076"/>
+          <ac:picMkLst>
+            <pc:docMk/>
+            <pc:sldMk cId="2360420157" sldId="265"/>
+            <ac:picMk id="6" creationId="{F3E98A77-2059-900D-BEDE-F3AB1612C147}"/>
+          </ac:picMkLst>
+        </pc:picChg>
+        <pc:picChg chg="del">
+          <ac:chgData name="Iker Joaquín" userId="acaffbe4a706a9d4" providerId="LiveId" clId="{D1DFD0CF-3B6A-4A93-9F8B-FF939B2F1C04}" dt="2025-11-24T11:43:14.647" v="103" actId="478"/>
+          <ac:picMkLst>
+            <pc:docMk/>
+            <pc:sldMk cId="2360420157" sldId="265"/>
+            <ac:picMk id="7" creationId="{5CA016E7-CD51-9119-C816-C85234B6FD9D}"/>
+          </ac:picMkLst>
+        </pc:picChg>
+        <pc:picChg chg="del">
+          <ac:chgData name="Iker Joaquín" userId="acaffbe4a706a9d4" providerId="LiveId" clId="{D1DFD0CF-3B6A-4A93-9F8B-FF939B2F1C04}" dt="2025-11-24T11:43:08.179" v="102" actId="478"/>
+          <ac:picMkLst>
+            <pc:docMk/>
+            <pc:sldMk cId="2360420157" sldId="265"/>
+            <ac:picMk id="9" creationId="{22F08692-0940-AD05-3931-06F4040D4C64}"/>
+          </ac:picMkLst>
+        </pc:picChg>
+      </pc:sldChg>
+    </pc:docChg>
+  </pc:docChgLst>
+</pc:chgInfo>
 </file>
 
 <file path=ppt/slideLayouts/slideLayout1.xml><?xml version="1.0" encoding="utf-8"?>
@@ -156,10 +325,9 @@
           </a:lstStyle>
           <a:p>
             <a:r>
-              <a:rPr lang="cs-CZ" smtClean="0"/>
+              <a:rPr lang="cs-CZ"/>
               <a:t>Kliknutím lze upravit styl.</a:t>
             </a:r>
-            <a:endParaRPr lang="cs-CZ"/>
           </a:p>
         </p:txBody>
       </p:sp>
@@ -221,10 +389,9 @@
           </a:lstStyle>
           <a:p>
             <a:r>
-              <a:rPr lang="cs-CZ" smtClean="0"/>
+              <a:rPr lang="cs-CZ"/>
               <a:t>Kliknutím můžete upravit styl předlohy.</a:t>
             </a:r>
-            <a:endParaRPr lang="cs-CZ"/>
           </a:p>
         </p:txBody>
       </p:sp>
@@ -287,7 +454,7 @@
           <a:p>
             <a:fld id="{D5632909-F848-46C4-A1DA-D7EC428885C6}" type="slidenum">
               <a:rPr lang="cs-CZ" smtClean="0"/>
-              <a:t>‹#›</a:t>
+              <a:t>‹Nº›</a:t>
             </a:fld>
             <a:endParaRPr lang="cs-CZ"/>
           </a:p>
@@ -339,10 +506,9 @@
           <a:lstStyle/>
           <a:p>
             <a:r>
-              <a:rPr lang="cs-CZ" smtClean="0"/>
+              <a:rPr lang="cs-CZ"/>
               <a:t>Kliknutím lze upravit styl.</a:t>
             </a:r>
-            <a:endParaRPr lang="cs-CZ"/>
           </a:p>
         </p:txBody>
       </p:sp>
@@ -363,38 +529,37 @@
           <a:p>
             <a:pPr lvl="0"/>
             <a:r>
-              <a:rPr lang="cs-CZ" smtClean="0"/>
+              <a:rPr lang="cs-CZ"/>
               <a:t>Upravte styly předlohy textu.</a:t>
             </a:r>
           </a:p>
           <a:p>
             <a:pPr lvl="1"/>
             <a:r>
-              <a:rPr lang="cs-CZ" smtClean="0"/>
+              <a:rPr lang="cs-CZ"/>
               <a:t>Druhá úroveň</a:t>
             </a:r>
           </a:p>
           <a:p>
             <a:pPr lvl="2"/>
             <a:r>
-              <a:rPr lang="cs-CZ" smtClean="0"/>
+              <a:rPr lang="cs-CZ"/>
               <a:t>Třetí úroveň</a:t>
             </a:r>
           </a:p>
           <a:p>
             <a:pPr lvl="3"/>
             <a:r>
-              <a:rPr lang="cs-CZ" smtClean="0"/>
+              <a:rPr lang="cs-CZ"/>
               <a:t>Čtvrtá úroveň</a:t>
             </a:r>
           </a:p>
           <a:p>
             <a:pPr lvl="4"/>
             <a:r>
-              <a:rPr lang="cs-CZ" smtClean="0"/>
+              <a:rPr lang="cs-CZ"/>
               <a:t>Pátá úroveň</a:t>
             </a:r>
-            <a:endParaRPr lang="cs-CZ"/>
           </a:p>
         </p:txBody>
       </p:sp>
@@ -457,7 +622,7 @@
           <a:p>
             <a:fld id="{D5632909-F848-46C4-A1DA-D7EC428885C6}" type="slidenum">
               <a:rPr lang="cs-CZ" smtClean="0"/>
-              <a:t>‹#›</a:t>
+              <a:t>‹Nº›</a:t>
             </a:fld>
             <a:endParaRPr lang="cs-CZ"/>
           </a:p>
@@ -514,10 +679,9 @@
           <a:lstStyle/>
           <a:p>
             <a:r>
-              <a:rPr lang="cs-CZ" smtClean="0"/>
+              <a:rPr lang="cs-CZ"/>
               <a:t>Kliknutím lze upravit styl.</a:t>
             </a:r>
-            <a:endParaRPr lang="cs-CZ"/>
           </a:p>
         </p:txBody>
       </p:sp>
@@ -543,38 +707,37 @@
           <a:p>
             <a:pPr lvl="0"/>
             <a:r>
-              <a:rPr lang="cs-CZ" smtClean="0"/>
+              <a:rPr lang="cs-CZ"/>
               <a:t>Upravte styly předlohy textu.</a:t>
             </a:r>
           </a:p>
           <a:p>
             <a:pPr lvl="1"/>
             <a:r>
-              <a:rPr lang="cs-CZ" smtClean="0"/>
+              <a:rPr lang="cs-CZ"/>
               <a:t>Druhá úroveň</a:t>
             </a:r>
           </a:p>
           <a:p>
             <a:pPr lvl="2"/>
             <a:r>
-              <a:rPr lang="cs-CZ" smtClean="0"/>
+              <a:rPr lang="cs-CZ"/>
               <a:t>Třetí úroveň</a:t>
             </a:r>
           </a:p>
           <a:p>
             <a:pPr lvl="3"/>
             <a:r>
-              <a:rPr lang="cs-CZ" smtClean="0"/>
+              <a:rPr lang="cs-CZ"/>
               <a:t>Čtvrtá úroveň</a:t>
             </a:r>
           </a:p>
           <a:p>
             <a:pPr lvl="4"/>
             <a:r>
-              <a:rPr lang="cs-CZ" smtClean="0"/>
+              <a:rPr lang="cs-CZ"/>
               <a:t>Pátá úroveň</a:t>
             </a:r>
-            <a:endParaRPr lang="cs-CZ"/>
           </a:p>
         </p:txBody>
       </p:sp>
@@ -637,7 +800,7 @@
           <a:p>
             <a:fld id="{D5632909-F848-46C4-A1DA-D7EC428885C6}" type="slidenum">
               <a:rPr lang="cs-CZ" smtClean="0"/>
-              <a:t>‹#›</a:t>
+              <a:t>‹Nº›</a:t>
             </a:fld>
             <a:endParaRPr lang="cs-CZ"/>
           </a:p>
@@ -689,10 +852,9 @@
           <a:lstStyle/>
           <a:p>
             <a:r>
-              <a:rPr lang="cs-CZ" smtClean="0"/>
+              <a:rPr lang="cs-CZ"/>
               <a:t>Kliknutím lze upravit styl.</a:t>
             </a:r>
-            <a:endParaRPr lang="cs-CZ"/>
           </a:p>
         </p:txBody>
       </p:sp>
@@ -713,38 +875,37 @@
           <a:p>
             <a:pPr lvl="0"/>
             <a:r>
-              <a:rPr lang="cs-CZ" smtClean="0"/>
+              <a:rPr lang="cs-CZ"/>
               <a:t>Upravte styly předlohy textu.</a:t>
             </a:r>
           </a:p>
           <a:p>
             <a:pPr lvl="1"/>
             <a:r>
-              <a:rPr lang="cs-CZ" smtClean="0"/>
+              <a:rPr lang="cs-CZ"/>
               <a:t>Druhá úroveň</a:t>
             </a:r>
           </a:p>
           <a:p>
             <a:pPr lvl="2"/>
             <a:r>
-              <a:rPr lang="cs-CZ" smtClean="0"/>
+              <a:rPr lang="cs-CZ"/>
               <a:t>Třetí úroveň</a:t>
             </a:r>
           </a:p>
           <a:p>
             <a:pPr lvl="3"/>
             <a:r>
-              <a:rPr lang="cs-CZ" smtClean="0"/>
+              <a:rPr lang="cs-CZ"/>
               <a:t>Čtvrtá úroveň</a:t>
             </a:r>
           </a:p>
           <a:p>
             <a:pPr lvl="4"/>
             <a:r>
-              <a:rPr lang="cs-CZ" smtClean="0"/>
+              <a:rPr lang="cs-CZ"/>
               <a:t>Pátá úroveň</a:t>
             </a:r>
-            <a:endParaRPr lang="cs-CZ"/>
           </a:p>
         </p:txBody>
       </p:sp>
@@ -807,7 +968,7 @@
           <a:p>
             <a:fld id="{D5632909-F848-46C4-A1DA-D7EC428885C6}" type="slidenum">
               <a:rPr lang="cs-CZ" smtClean="0"/>
-              <a:t>‹#›</a:t>
+              <a:t>‹Nº›</a:t>
             </a:fld>
             <a:endParaRPr lang="cs-CZ"/>
           </a:p>
@@ -868,10 +1029,9 @@
           </a:lstStyle>
           <a:p>
             <a:r>
-              <a:rPr lang="cs-CZ" smtClean="0"/>
+              <a:rPr lang="cs-CZ"/>
               <a:t>Kliknutím lze upravit styl.</a:t>
             </a:r>
-            <a:endParaRPr lang="cs-CZ"/>
           </a:p>
         </p:txBody>
       </p:sp>
@@ -988,7 +1148,7 @@
           <a:p>
             <a:pPr lvl="0"/>
             <a:r>
-              <a:rPr lang="cs-CZ" smtClean="0"/>
+              <a:rPr lang="cs-CZ"/>
               <a:t>Upravte styly předlohy textu.</a:t>
             </a:r>
           </a:p>
@@ -1053,7 +1213,7 @@
           <a:p>
             <a:fld id="{D5632909-F848-46C4-A1DA-D7EC428885C6}" type="slidenum">
               <a:rPr lang="cs-CZ" smtClean="0"/>
-              <a:t>‹#›</a:t>
+              <a:t>‹Nº›</a:t>
             </a:fld>
             <a:endParaRPr lang="cs-CZ"/>
           </a:p>
@@ -1105,10 +1265,9 @@
           <a:lstStyle/>
           <a:p>
             <a:r>
-              <a:rPr lang="cs-CZ" smtClean="0"/>
+              <a:rPr lang="cs-CZ"/>
               <a:t>Kliknutím lze upravit styl.</a:t>
             </a:r>
-            <a:endParaRPr lang="cs-CZ"/>
           </a:p>
         </p:txBody>
       </p:sp>
@@ -1134,38 +1293,37 @@
           <a:p>
             <a:pPr lvl="0"/>
             <a:r>
-              <a:rPr lang="cs-CZ" smtClean="0"/>
+              <a:rPr lang="cs-CZ"/>
               <a:t>Upravte styly předlohy textu.</a:t>
             </a:r>
           </a:p>
           <a:p>
             <a:pPr lvl="1"/>
             <a:r>
-              <a:rPr lang="cs-CZ" smtClean="0"/>
+              <a:rPr lang="cs-CZ"/>
               <a:t>Druhá úroveň</a:t>
             </a:r>
           </a:p>
           <a:p>
             <a:pPr lvl="2"/>
             <a:r>
-              <a:rPr lang="cs-CZ" smtClean="0"/>
+              <a:rPr lang="cs-CZ"/>
               <a:t>Třetí úroveň</a:t>
             </a:r>
           </a:p>
           <a:p>
             <a:pPr lvl="3"/>
             <a:r>
-              <a:rPr lang="cs-CZ" smtClean="0"/>
+              <a:rPr lang="cs-CZ"/>
               <a:t>Čtvrtá úroveň</a:t>
             </a:r>
           </a:p>
           <a:p>
             <a:pPr lvl="4"/>
             <a:r>
-              <a:rPr lang="cs-CZ" smtClean="0"/>
+              <a:rPr lang="cs-CZ"/>
               <a:t>Pátá úroveň</a:t>
             </a:r>
-            <a:endParaRPr lang="cs-CZ"/>
           </a:p>
         </p:txBody>
       </p:sp>
@@ -1191,38 +1349,37 @@
           <a:p>
             <a:pPr lvl="0"/>
             <a:r>
-              <a:rPr lang="cs-CZ" smtClean="0"/>
+              <a:rPr lang="cs-CZ"/>
               <a:t>Upravte styly předlohy textu.</a:t>
             </a:r>
           </a:p>
           <a:p>
             <a:pPr lvl="1"/>
             <a:r>
-              <a:rPr lang="cs-CZ" smtClean="0"/>
+              <a:rPr lang="cs-CZ"/>
               <a:t>Druhá úroveň</a:t>
             </a:r>
           </a:p>
           <a:p>
             <a:pPr lvl="2"/>
             <a:r>
-              <a:rPr lang="cs-CZ" smtClean="0"/>
+              <a:rPr lang="cs-CZ"/>
               <a:t>Třetí úroveň</a:t>
             </a:r>
           </a:p>
           <a:p>
             <a:pPr lvl="3"/>
             <a:r>
-              <a:rPr lang="cs-CZ" smtClean="0"/>
+              <a:rPr lang="cs-CZ"/>
               <a:t>Čtvrtá úroveň</a:t>
             </a:r>
           </a:p>
           <a:p>
             <a:pPr lvl="4"/>
             <a:r>
-              <a:rPr lang="cs-CZ" smtClean="0"/>
+              <a:rPr lang="cs-CZ"/>
               <a:t>Pátá úroveň</a:t>
             </a:r>
-            <a:endParaRPr lang="cs-CZ"/>
           </a:p>
         </p:txBody>
       </p:sp>
@@ -1285,7 +1442,7 @@
           <a:p>
             <a:fld id="{D5632909-F848-46C4-A1DA-D7EC428885C6}" type="slidenum">
               <a:rPr lang="cs-CZ" smtClean="0"/>
-              <a:t>‹#›</a:t>
+              <a:t>‹Nº›</a:t>
             </a:fld>
             <a:endParaRPr lang="cs-CZ"/>
           </a:p>
@@ -1342,10 +1499,9 @@
           <a:lstStyle/>
           <a:p>
             <a:r>
-              <a:rPr lang="cs-CZ" smtClean="0"/>
+              <a:rPr lang="cs-CZ"/>
               <a:t>Kliknutím lze upravit styl.</a:t>
             </a:r>
-            <a:endParaRPr lang="cs-CZ"/>
           </a:p>
         </p:txBody>
       </p:sp>
@@ -1408,7 +1564,7 @@
           <a:p>
             <a:pPr lvl="0"/>
             <a:r>
-              <a:rPr lang="cs-CZ" smtClean="0"/>
+              <a:rPr lang="cs-CZ"/>
               <a:t>Upravte styly předlohy textu.</a:t>
             </a:r>
           </a:p>
@@ -1436,38 +1592,37 @@
           <a:p>
             <a:pPr lvl="0"/>
             <a:r>
-              <a:rPr lang="cs-CZ" smtClean="0"/>
+              <a:rPr lang="cs-CZ"/>
               <a:t>Upravte styly předlohy textu.</a:t>
             </a:r>
           </a:p>
           <a:p>
             <a:pPr lvl="1"/>
             <a:r>
-              <a:rPr lang="cs-CZ" smtClean="0"/>
+              <a:rPr lang="cs-CZ"/>
               <a:t>Druhá úroveň</a:t>
             </a:r>
           </a:p>
           <a:p>
             <a:pPr lvl="2"/>
             <a:r>
-              <a:rPr lang="cs-CZ" smtClean="0"/>
+              <a:rPr lang="cs-CZ"/>
               <a:t>Třetí úroveň</a:t>
             </a:r>
           </a:p>
           <a:p>
             <a:pPr lvl="3"/>
             <a:r>
-              <a:rPr lang="cs-CZ" smtClean="0"/>
+              <a:rPr lang="cs-CZ"/>
               <a:t>Čtvrtá úroveň</a:t>
             </a:r>
           </a:p>
           <a:p>
             <a:pPr lvl="4"/>
             <a:r>
-              <a:rPr lang="cs-CZ" smtClean="0"/>
+              <a:rPr lang="cs-CZ"/>
               <a:t>Pátá úroveň</a:t>
             </a:r>
-            <a:endParaRPr lang="cs-CZ"/>
           </a:p>
         </p:txBody>
       </p:sp>
@@ -1530,7 +1685,7 @@
           <a:p>
             <a:pPr lvl="0"/>
             <a:r>
-              <a:rPr lang="cs-CZ" smtClean="0"/>
+              <a:rPr lang="cs-CZ"/>
               <a:t>Upravte styly předlohy textu.</a:t>
             </a:r>
           </a:p>
@@ -1558,38 +1713,37 @@
           <a:p>
             <a:pPr lvl="0"/>
             <a:r>
-              <a:rPr lang="cs-CZ" smtClean="0"/>
+              <a:rPr lang="cs-CZ"/>
               <a:t>Upravte styly předlohy textu.</a:t>
             </a:r>
           </a:p>
           <a:p>
             <a:pPr lvl="1"/>
             <a:r>
-              <a:rPr lang="cs-CZ" smtClean="0"/>
+              <a:rPr lang="cs-CZ"/>
               <a:t>Druhá úroveň</a:t>
             </a:r>
           </a:p>
           <a:p>
             <a:pPr lvl="2"/>
             <a:r>
-              <a:rPr lang="cs-CZ" smtClean="0"/>
+              <a:rPr lang="cs-CZ"/>
               <a:t>Třetí úroveň</a:t>
             </a:r>
           </a:p>
           <a:p>
             <a:pPr lvl="3"/>
             <a:r>
-              <a:rPr lang="cs-CZ" smtClean="0"/>
+              <a:rPr lang="cs-CZ"/>
               <a:t>Čtvrtá úroveň</a:t>
             </a:r>
           </a:p>
           <a:p>
             <a:pPr lvl="4"/>
             <a:r>
-              <a:rPr lang="cs-CZ" smtClean="0"/>
+              <a:rPr lang="cs-CZ"/>
               <a:t>Pátá úroveň</a:t>
             </a:r>
-            <a:endParaRPr lang="cs-CZ"/>
           </a:p>
         </p:txBody>
       </p:sp>
@@ -1652,7 +1806,7 @@
           <a:p>
             <a:fld id="{D5632909-F848-46C4-A1DA-D7EC428885C6}" type="slidenum">
               <a:rPr lang="cs-CZ" smtClean="0"/>
-              <a:t>‹#›</a:t>
+              <a:t>‹Nº›</a:t>
             </a:fld>
             <a:endParaRPr lang="cs-CZ"/>
           </a:p>
@@ -1704,10 +1858,9 @@
           <a:lstStyle/>
           <a:p>
             <a:r>
-              <a:rPr lang="cs-CZ" smtClean="0"/>
+              <a:rPr lang="cs-CZ"/>
               <a:t>Kliknutím lze upravit styl.</a:t>
             </a:r>
-            <a:endParaRPr lang="cs-CZ"/>
           </a:p>
         </p:txBody>
       </p:sp>
@@ -1770,7 +1923,7 @@
           <a:p>
             <a:fld id="{D5632909-F848-46C4-A1DA-D7EC428885C6}" type="slidenum">
               <a:rPr lang="cs-CZ" smtClean="0"/>
-              <a:t>‹#›</a:t>
+              <a:t>‹Nº›</a:t>
             </a:fld>
             <a:endParaRPr lang="cs-CZ"/>
           </a:p>
@@ -1865,7 +2018,7 @@
           <a:p>
             <a:fld id="{D5632909-F848-46C4-A1DA-D7EC428885C6}" type="slidenum">
               <a:rPr lang="cs-CZ" smtClean="0"/>
-              <a:t>‹#›</a:t>
+              <a:t>‹Nº›</a:t>
             </a:fld>
             <a:endParaRPr lang="cs-CZ"/>
           </a:p>
@@ -1926,10 +2079,9 @@
           </a:lstStyle>
           <a:p>
             <a:r>
-              <a:rPr lang="cs-CZ" smtClean="0"/>
+              <a:rPr lang="cs-CZ"/>
               <a:t>Kliknutím lze upravit styl.</a:t>
             </a:r>
-            <a:endParaRPr lang="cs-CZ"/>
           </a:p>
         </p:txBody>
       </p:sp>
@@ -1983,38 +2135,37 @@
           <a:p>
             <a:pPr lvl="0"/>
             <a:r>
-              <a:rPr lang="cs-CZ" smtClean="0"/>
+              <a:rPr lang="cs-CZ"/>
               <a:t>Upravte styly předlohy textu.</a:t>
             </a:r>
           </a:p>
           <a:p>
             <a:pPr lvl="1"/>
             <a:r>
-              <a:rPr lang="cs-CZ" smtClean="0"/>
+              <a:rPr lang="cs-CZ"/>
               <a:t>Druhá úroveň</a:t>
             </a:r>
           </a:p>
           <a:p>
             <a:pPr lvl="2"/>
             <a:r>
-              <a:rPr lang="cs-CZ" smtClean="0"/>
+              <a:rPr lang="cs-CZ"/>
               <a:t>Třetí úroveň</a:t>
             </a:r>
           </a:p>
           <a:p>
             <a:pPr lvl="3"/>
             <a:r>
-              <a:rPr lang="cs-CZ" smtClean="0"/>
+              <a:rPr lang="cs-CZ"/>
               <a:t>Čtvrtá úroveň</a:t>
             </a:r>
           </a:p>
           <a:p>
             <a:pPr lvl="4"/>
             <a:r>
-              <a:rPr lang="cs-CZ" smtClean="0"/>
+              <a:rPr lang="cs-CZ"/>
               <a:t>Pátá úroveň</a:t>
             </a:r>
-            <a:endParaRPr lang="cs-CZ"/>
           </a:p>
         </p:txBody>
       </p:sp>
@@ -2077,7 +2228,7 @@
           <a:p>
             <a:pPr lvl="0"/>
             <a:r>
-              <a:rPr lang="cs-CZ" smtClean="0"/>
+              <a:rPr lang="cs-CZ"/>
               <a:t>Upravte styly předlohy textu.</a:t>
             </a:r>
           </a:p>
@@ -2142,7 +2293,7 @@
           <a:p>
             <a:fld id="{D5632909-F848-46C4-A1DA-D7EC428885C6}" type="slidenum">
               <a:rPr lang="cs-CZ" smtClean="0"/>
-              <a:t>‹#›</a:t>
+              <a:t>‹Nº›</a:t>
             </a:fld>
             <a:endParaRPr lang="cs-CZ"/>
           </a:p>
@@ -2203,10 +2354,9 @@
           </a:lstStyle>
           <a:p>
             <a:r>
-              <a:rPr lang="cs-CZ" smtClean="0"/>
+              <a:rPr lang="cs-CZ"/>
               <a:t>Kliknutím lze upravit styl.</a:t>
             </a:r>
-            <a:endParaRPr lang="cs-CZ"/>
           </a:p>
         </p:txBody>
       </p:sp>
@@ -2330,7 +2480,7 @@
           <a:p>
             <a:pPr lvl="0"/>
             <a:r>
-              <a:rPr lang="cs-CZ" smtClean="0"/>
+              <a:rPr lang="cs-CZ"/>
               <a:t>Upravte styly předlohy textu.</a:t>
             </a:r>
           </a:p>
@@ -2395,7 +2545,7 @@
           <a:p>
             <a:fld id="{D5632909-F848-46C4-A1DA-D7EC428885C6}" type="slidenum">
               <a:rPr lang="cs-CZ" smtClean="0"/>
-              <a:t>‹#›</a:t>
+              <a:t>‹Nº›</a:t>
             </a:fld>
             <a:endParaRPr lang="cs-CZ"/>
           </a:p>
@@ -2462,10 +2612,9 @@
           <a:lstStyle/>
           <a:p>
             <a:r>
-              <a:rPr lang="cs-CZ" smtClean="0"/>
+              <a:rPr lang="cs-CZ"/>
               <a:t>Kliknutím lze upravit styl.</a:t>
             </a:r>
-            <a:endParaRPr lang="cs-CZ"/>
           </a:p>
         </p:txBody>
       </p:sp>
@@ -2496,38 +2645,37 @@
           <a:p>
             <a:pPr lvl="0"/>
             <a:r>
-              <a:rPr lang="cs-CZ" smtClean="0"/>
+              <a:rPr lang="cs-CZ"/>
               <a:t>Upravte styly předlohy textu.</a:t>
             </a:r>
           </a:p>
           <a:p>
             <a:pPr lvl="1"/>
             <a:r>
-              <a:rPr lang="cs-CZ" smtClean="0"/>
+              <a:rPr lang="cs-CZ"/>
               <a:t>Druhá úroveň</a:t>
             </a:r>
           </a:p>
           <a:p>
             <a:pPr lvl="2"/>
             <a:r>
-              <a:rPr lang="cs-CZ" smtClean="0"/>
+              <a:rPr lang="cs-CZ"/>
               <a:t>Třetí úroveň</a:t>
             </a:r>
           </a:p>
           <a:p>
             <a:pPr lvl="3"/>
             <a:r>
-              <a:rPr lang="cs-CZ" smtClean="0"/>
+              <a:rPr lang="cs-CZ"/>
               <a:t>Čtvrtá úroveň</a:t>
             </a:r>
           </a:p>
           <a:p>
             <a:pPr lvl="4"/>
             <a:r>
-              <a:rPr lang="cs-CZ" smtClean="0"/>
+              <a:rPr lang="cs-CZ"/>
               <a:t>Pátá úroveň</a:t>
             </a:r>
-            <a:endParaRPr lang="cs-CZ"/>
           </a:p>
         </p:txBody>
       </p:sp>
@@ -2644,7 +2792,7 @@
           <a:p>
             <a:fld id="{D5632909-F848-46C4-A1DA-D7EC428885C6}" type="slidenum">
               <a:rPr lang="cs-CZ" smtClean="0"/>
-              <a:t>‹#›</a:t>
+              <a:t>‹Nº›</a:t>
             </a:fld>
             <a:endParaRPr lang="cs-CZ"/>
           </a:p>
@@ -2987,7 +3135,7 @@
           <a:lstStyle/>
           <a:p>
             <a:r>
-              <a:rPr lang="en-US" dirty="0" smtClean="0"/>
+              <a:rPr lang="en-US" dirty="0"/>
               <a:t>Schedules 1</a:t>
             </a:r>
             <a:endParaRPr lang="cs-CZ" dirty="0"/>
@@ -3017,53 +3165,41 @@
           <a:lstStyle/>
           <a:p>
             <a:r>
-              <a:rPr lang="en-US" dirty="0" smtClean="0"/>
+              <a:rPr lang="en-US" dirty="0"/>
               <a:t>Team members:</a:t>
             </a:r>
             <a:br>
-              <a:rPr lang="en-US" dirty="0" smtClean="0"/>
+              <a:rPr lang="en-US" dirty="0"/>
             </a:br>
             <a:r>
-              <a:rPr lang="en-US" dirty="0" smtClean="0"/>
+              <a:rPr lang="en-US" dirty="0"/>
               <a:t>Martin</a:t>
             </a:r>
           </a:p>
           <a:p>
             <a:r>
-              <a:rPr lang="en-US" dirty="0" err="1" smtClean="0"/>
+              <a:rPr lang="en-US" dirty="0" err="1"/>
               <a:t>Vladyslav</a:t>
             </a:r>
-            <a:r>
-              <a:rPr lang="en-US" dirty="0" smtClean="0"/>
-              <a:t/>
-            </a:r>
             <a:br>
-              <a:rPr lang="en-US" dirty="0" smtClean="0"/>
+              <a:rPr lang="en-US" dirty="0"/>
             </a:br>
             <a:r>
-              <a:rPr lang="en-US" dirty="0" err="1" smtClean="0"/>
+              <a:rPr lang="en-US" dirty="0" err="1"/>
               <a:t>Valentyn</a:t>
             </a:r>
-            <a:r>
-              <a:rPr lang="en-US" dirty="0" smtClean="0"/>
-              <a:t/>
-            </a:r>
             <a:br>
-              <a:rPr lang="en-US" dirty="0" smtClean="0"/>
+              <a:rPr lang="en-US" dirty="0"/>
             </a:br>
             <a:r>
-              <a:rPr lang="en-US" dirty="0" err="1" smtClean="0"/>
+              <a:rPr lang="en-US" dirty="0" err="1"/>
               <a:t>Yash</a:t>
             </a:r>
-            <a:r>
-              <a:rPr lang="en-US" dirty="0" smtClean="0"/>
-              <a:t/>
-            </a:r>
             <a:br>
-              <a:rPr lang="en-US" dirty="0" smtClean="0"/>
+              <a:rPr lang="en-US" dirty="0"/>
             </a:br>
             <a:r>
-              <a:rPr lang="en-US" dirty="0" smtClean="0"/>
+              <a:rPr lang="en-US" dirty="0"/>
               <a:t>Iker</a:t>
             </a:r>
             <a:endParaRPr lang="cs-CZ" dirty="0"/>
@@ -3074,6 +3210,78 @@
     <p:extLst>
       <p:ext uri="{BB962C8B-B14F-4D97-AF65-F5344CB8AC3E}">
         <p14:creationId xmlns:p14="http://schemas.microsoft.com/office/powerpoint/2010/main" val="1220972954"/>
+      </p:ext>
+    </p:extLst>
+  </p:cSld>
+  <p:clrMapOvr>
+    <a:masterClrMapping/>
+  </p:clrMapOvr>
+</p:sld>
+</file>
+
+<file path=ppt/slides/slide10.xml><?xml version="1.0" encoding="utf-8"?>
+<p:sld xmlns:a="http://schemas.openxmlformats.org/drawingml/2006/main" xmlns:r="http://schemas.openxmlformats.org/officeDocument/2006/relationships" xmlns:p="http://schemas.openxmlformats.org/presentationml/2006/main">
+  <p:cSld>
+    <p:spTree>
+      <p:nvGrpSpPr>
+        <p:cNvPr id="1" name=""/>
+        <p:cNvGrpSpPr/>
+        <p:nvPr/>
+      </p:nvGrpSpPr>
+      <p:grpSpPr>
+        <a:xfrm>
+          <a:off x="0" y="0"/>
+          <a:ext cx="0" cy="0"/>
+          <a:chOff x="0" y="0"/>
+          <a:chExt cx="0" cy="0"/>
+        </a:xfrm>
+      </p:grpSpPr>
+      <p:sp>
+        <p:nvSpPr>
+          <p:cNvPr id="2" name="Nadpis 1"/>
+          <p:cNvSpPr>
+            <a:spLocks noGrp="1"/>
+          </p:cNvSpPr>
+          <p:nvPr>
+            <p:ph type="ctrTitle"/>
+          </p:nvPr>
+        </p:nvSpPr>
+        <p:spPr/>
+        <p:txBody>
+          <a:bodyPr/>
+          <a:lstStyle/>
+          <a:p>
+            <a:r>
+              <a:rPr lang="en-US" dirty="0"/>
+              <a:t>Thank you</a:t>
+            </a:r>
+            <a:endParaRPr lang="cs-CZ" dirty="0"/>
+          </a:p>
+        </p:txBody>
+      </p:sp>
+      <p:sp>
+        <p:nvSpPr>
+          <p:cNvPr id="3" name="Podnadpis 2"/>
+          <p:cNvSpPr>
+            <a:spLocks noGrp="1"/>
+          </p:cNvSpPr>
+          <p:nvPr>
+            <p:ph type="subTitle" idx="1"/>
+          </p:nvPr>
+        </p:nvSpPr>
+        <p:spPr/>
+        <p:txBody>
+          <a:bodyPr/>
+          <a:lstStyle/>
+          <a:p>
+            <a:endParaRPr lang="cs-CZ" dirty="0"/>
+          </a:p>
+        </p:txBody>
+      </p:sp>
+    </p:spTree>
+    <p:extLst>
+      <p:ext uri="{BB962C8B-B14F-4D97-AF65-F5344CB8AC3E}">
+        <p14:creationId xmlns:p14="http://schemas.microsoft.com/office/powerpoint/2010/main" val="2724615140"/>
       </p:ext>
     </p:extLst>
   </p:cSld>
@@ -3116,7 +3324,7 @@
           <a:lstStyle/>
           <a:p>
             <a:r>
-              <a:rPr lang="en-US" dirty="0" smtClean="0"/>
+              <a:rPr lang="en-US" dirty="0"/>
               <a:t>Core Features</a:t>
             </a:r>
             <a:endParaRPr lang="cs-CZ" dirty="0"/>
@@ -3139,47 +3347,47 @@
           <a:lstStyle/>
           <a:p>
             <a:r>
-              <a:rPr lang="en-US" dirty="0" smtClean="0"/>
+              <a:rPr lang="en-US" dirty="0"/>
               <a:t>Viewing the timetable (</a:t>
             </a:r>
             <a:r>
-              <a:rPr lang="en-US" dirty="0" err="1" smtClean="0"/>
+              <a:rPr lang="en-US" dirty="0" err="1"/>
               <a:t>Valentyn</a:t>
             </a:r>
             <a:r>
-              <a:rPr lang="en-US" dirty="0" smtClean="0"/>
+              <a:rPr lang="en-US" dirty="0"/>
               <a:t>)</a:t>
             </a:r>
           </a:p>
           <a:p>
             <a:r>
-              <a:rPr lang="en-US" dirty="0" smtClean="0"/>
+              <a:rPr lang="en-US" dirty="0"/>
               <a:t>Viewing the course info (</a:t>
             </a:r>
             <a:r>
-              <a:rPr lang="en-US" dirty="0" err="1" smtClean="0"/>
+              <a:rPr lang="en-US" dirty="0" err="1"/>
               <a:t>Yash</a:t>
             </a:r>
             <a:r>
-              <a:rPr lang="en-US" dirty="0" smtClean="0"/>
+              <a:rPr lang="en-US" dirty="0"/>
               <a:t>)</a:t>
             </a:r>
           </a:p>
           <a:p>
             <a:r>
-              <a:rPr lang="en-US" dirty="0" smtClean="0"/>
+              <a:rPr lang="en-US" dirty="0"/>
               <a:t>Viewing the teacher info – office hours (Iker)</a:t>
             </a:r>
           </a:p>
           <a:p>
             <a:r>
-              <a:rPr lang="en-US" dirty="0" smtClean="0"/>
+              <a:rPr lang="en-US" dirty="0"/>
               <a:t>Schedule modification (Vlad)</a:t>
             </a:r>
           </a:p>
           <a:p>
             <a:r>
-              <a:rPr lang="en-US" dirty="0" smtClean="0"/>
+              <a:rPr lang="en-US" dirty="0"/>
               <a:t>Statistical reports (Martin)</a:t>
             </a:r>
             <a:endParaRPr lang="cs-CZ" dirty="0"/>
@@ -3202,6 +3410,208 @@
 <file path=ppt/slides/slide3.xml><?xml version="1.0" encoding="utf-8"?>
 <p:sld xmlns:a="http://schemas.openxmlformats.org/drawingml/2006/main" xmlns:r="http://schemas.openxmlformats.org/officeDocument/2006/relationships" xmlns:p="http://schemas.openxmlformats.org/presentationml/2006/main">
   <p:cSld>
+    <p:bg>
+      <p:bgPr>
+        <a:solidFill>
+          <a:schemeClr val="bg1"/>
+        </a:solidFill>
+        <a:effectLst/>
+      </p:bgPr>
+    </p:bg>
+    <p:spTree>
+      <p:nvGrpSpPr>
+        <p:cNvPr id="1" name="">
+          <a:extLst>
+            <a:ext uri="{FF2B5EF4-FFF2-40B4-BE49-F238E27FC236}">
+              <a16:creationId xmlns:a16="http://schemas.microsoft.com/office/drawing/2014/main" id="{BD3B5998-786D-14F9-6C33-6D10DB5E3AAF}"/>
+            </a:ext>
+          </a:extLst>
+        </p:cNvPr>
+        <p:cNvGrpSpPr/>
+        <p:nvPr/>
+      </p:nvGrpSpPr>
+      <p:grpSpPr>
+        <a:xfrm>
+          <a:off x="0" y="0"/>
+          <a:ext cx="0" cy="0"/>
+          <a:chOff x="0" y="0"/>
+          <a:chExt cx="0" cy="0"/>
+        </a:xfrm>
+      </p:grpSpPr>
+      <p:sp useBgFill="1">
+        <p:nvSpPr>
+          <p:cNvPr id="14" name="Rectangle 13">
+            <a:extLst>
+              <a:ext uri="{FF2B5EF4-FFF2-40B4-BE49-F238E27FC236}">
+                <a16:creationId xmlns:a16="http://schemas.microsoft.com/office/drawing/2014/main" id="{B4FCDB4A-EA76-D74C-E77E-A11D85FEAE19}"/>
+              </a:ext>
+              <a:ext uri="{C183D7F6-B498-43B3-948B-1728B52AA6E4}">
+                <adec:decorative xmlns:adec="http://schemas.microsoft.com/office/drawing/2017/decorative" val="1"/>
+              </a:ext>
+            </a:extLst>
+          </p:cNvPr>
+          <p:cNvSpPr>
+            <a:spLocks noGrp="1" noRot="1" noChangeAspect="1" noMove="1" noResize="1" noEditPoints="1" noAdjustHandles="1" noChangeArrowheads="1" noChangeShapeType="1" noTextEdit="1"/>
+          </p:cNvSpPr>
+          <p:nvPr>
+            <p:extLst>
+              <p:ext uri="{386F3935-93C4-4BCD-93E2-E3B085C9AB24}">
+                <p16:designElem xmlns:p16="http://schemas.microsoft.com/office/powerpoint/2015/main" val="1"/>
+              </p:ext>
+            </p:extLst>
+          </p:nvPr>
+        </p:nvSpPr>
+        <p:spPr>
+          <a:xfrm>
+            <a:off x="-1" y="0"/>
+            <a:ext cx="12188952" cy="6858000"/>
+          </a:xfrm>
+          <a:prstGeom prst="rect">
+            <a:avLst/>
+          </a:prstGeom>
+          <a:ln>
+            <a:noFill/>
+          </a:ln>
+        </p:spPr>
+        <p:style>
+          <a:lnRef idx="2">
+            <a:schemeClr val="accent1">
+              <a:shade val="50000"/>
+            </a:schemeClr>
+          </a:lnRef>
+          <a:fillRef idx="1">
+            <a:schemeClr val="accent1"/>
+          </a:fillRef>
+          <a:effectRef idx="0">
+            <a:schemeClr val="accent1"/>
+          </a:effectRef>
+          <a:fontRef idx="minor">
+            <a:schemeClr val="lt1"/>
+          </a:fontRef>
+        </p:style>
+        <p:txBody>
+          <a:bodyPr rtlCol="0" anchor="ctr"/>
+          <a:lstStyle/>
+          <a:p>
+            <a:pPr algn="ctr"/>
+            <a:endParaRPr lang="en-US"/>
+          </a:p>
+        </p:txBody>
+      </p:sp>
+      <p:sp>
+        <p:nvSpPr>
+          <p:cNvPr id="2" name="Nadpis 1">
+            <a:extLst>
+              <a:ext uri="{FF2B5EF4-FFF2-40B4-BE49-F238E27FC236}">
+                <a16:creationId xmlns:a16="http://schemas.microsoft.com/office/drawing/2014/main" id="{DA87C2A9-410E-C863-BF7A-820E45945E70}"/>
+              </a:ext>
+            </a:extLst>
+          </p:cNvPr>
+          <p:cNvSpPr>
+            <a:spLocks noGrp="1"/>
+          </p:cNvSpPr>
+          <p:nvPr>
+            <p:ph type="title"/>
+          </p:nvPr>
+        </p:nvSpPr>
+        <p:spPr>
+          <a:xfrm>
+            <a:off x="1001684" y="170412"/>
+            <a:ext cx="10178934" cy="1328730"/>
+          </a:xfrm>
+        </p:spPr>
+        <p:txBody>
+          <a:bodyPr vert="horz" lIns="91440" tIns="45720" rIns="91440" bIns="45720" rtlCol="0" anchor="b">
+            <a:normAutofit/>
+          </a:bodyPr>
+          <a:lstStyle/>
+          <a:p>
+            <a:pPr algn="ctr"/>
+            <a:r>
+              <a:rPr lang="en-US" sz="5200" kern="1200" dirty="0">
+                <a:solidFill>
+                  <a:schemeClr val="tx1"/>
+                </a:solidFill>
+                <a:latin typeface="+mj-lt"/>
+                <a:ea typeface="+mj-ea"/>
+                <a:cs typeface="+mj-cs"/>
+              </a:rPr>
+              <a:t>Layered Architecture – Office Hours</a:t>
+            </a:r>
+          </a:p>
+        </p:txBody>
+      </p:sp>
+      <p:sp>
+        <p:nvSpPr>
+          <p:cNvPr id="4" name="Marcador de contenido 3">
+            <a:extLst>
+              <a:ext uri="{FF2B5EF4-FFF2-40B4-BE49-F238E27FC236}">
+                <a16:creationId xmlns:a16="http://schemas.microsoft.com/office/drawing/2014/main" id="{8B59B3E3-153C-407E-8FE3-3BBA417EDE79}"/>
+              </a:ext>
+            </a:extLst>
+          </p:cNvPr>
+          <p:cNvSpPr>
+            <a:spLocks noGrp="1"/>
+          </p:cNvSpPr>
+          <p:nvPr>
+            <p:ph idx="1"/>
+          </p:nvPr>
+        </p:nvSpPr>
+        <p:spPr/>
+        <p:txBody>
+          <a:bodyPr/>
+          <a:lstStyle/>
+          <a:p>
+            <a:endParaRPr lang="es-ES" dirty="0"/>
+          </a:p>
+        </p:txBody>
+      </p:sp>
+      <p:pic>
+        <p:nvPicPr>
+          <p:cNvPr id="6" name="Imagen 5">
+            <a:extLst>
+              <a:ext uri="{FF2B5EF4-FFF2-40B4-BE49-F238E27FC236}">
+                <a16:creationId xmlns:a16="http://schemas.microsoft.com/office/drawing/2014/main" id="{F3E98A77-2059-900D-BEDE-F3AB1612C147}"/>
+              </a:ext>
+            </a:extLst>
+          </p:cNvPr>
+          <p:cNvPicPr>
+            <a:picLocks noChangeAspect="1"/>
+          </p:cNvPicPr>
+          <p:nvPr/>
+        </p:nvPicPr>
+        <p:blipFill>
+          <a:blip r:embed="rId2"/>
+          <a:stretch>
+            <a:fillRect/>
+          </a:stretch>
+        </p:blipFill>
+        <p:spPr>
+          <a:xfrm>
+            <a:off x="0" y="1825625"/>
+            <a:ext cx="12192000" cy="4344537"/>
+          </a:xfrm>
+          <a:prstGeom prst="rect">
+            <a:avLst/>
+          </a:prstGeom>
+        </p:spPr>
+      </p:pic>
+    </p:spTree>
+    <p:extLst>
+      <p:ext uri="{BB962C8B-B14F-4D97-AF65-F5344CB8AC3E}">
+        <p14:creationId xmlns:p14="http://schemas.microsoft.com/office/powerpoint/2010/main" val="2360420157"/>
+      </p:ext>
+    </p:extLst>
+  </p:cSld>
+  <p:clrMapOvr>
+    <a:masterClrMapping/>
+  </p:clrMapOvr>
+</p:sld>
+</file>
+
+<file path=ppt/slides/slide4.xml><?xml version="1.0" encoding="utf-8"?>
+<p:sld xmlns:a="http://schemas.openxmlformats.org/drawingml/2006/main" xmlns:r="http://schemas.openxmlformats.org/officeDocument/2006/relationships" xmlns:p="http://schemas.openxmlformats.org/presentationml/2006/main">
+  <p:cSld>
     <p:spTree>
       <p:nvGrpSpPr>
         <p:cNvPr id="1" name=""/>
@@ -3232,16 +3642,8 @@
           <a:lstStyle/>
           <a:p>
             <a:r>
-              <a:rPr lang="en-US" dirty="0" smtClean="0"/>
-              <a:t>C4 model </a:t>
-            </a:r>
-            <a:r>
-              <a:rPr lang="en-US" dirty="0" smtClean="0"/>
-              <a:t>L1 </a:t>
-            </a:r>
-            <a:r>
-              <a:rPr lang="en-US" dirty="0" smtClean="0"/>
-              <a:t>:</a:t>
+              <a:rPr lang="en-US" dirty="0"/>
+              <a:t>C4 model L1 :</a:t>
             </a:r>
             <a:endParaRPr lang="cs-CZ" dirty="0"/>
           </a:p>
@@ -3303,7 +3705,7 @@
 </p:sld>
 </file>
 
-<file path=ppt/slides/slide4.xml><?xml version="1.0" encoding="utf-8"?>
+<file path=ppt/slides/slide5.xml><?xml version="1.0" encoding="utf-8"?>
 <p:sld xmlns:a="http://schemas.openxmlformats.org/drawingml/2006/main" xmlns:r="http://schemas.openxmlformats.org/officeDocument/2006/relationships" xmlns:p="http://schemas.openxmlformats.org/presentationml/2006/main">
   <p:cSld>
     <p:spTree>
@@ -3336,7 +3738,7 @@
           <a:lstStyle/>
           <a:p>
             <a:r>
-              <a:rPr lang="en-US" dirty="0" smtClean="0"/>
+              <a:rPr lang="en-US" dirty="0"/>
               <a:t>C4 Model L2:</a:t>
             </a:r>
             <a:endParaRPr lang="cs-CZ" dirty="0"/>
@@ -3382,7 +3784,7 @@
 </p:sld>
 </file>
 
-<file path=ppt/slides/slide5.xml><?xml version="1.0" encoding="utf-8"?>
+<file path=ppt/slides/slide6.xml><?xml version="1.0" encoding="utf-8"?>
 <p:sld xmlns:a="http://schemas.openxmlformats.org/drawingml/2006/main" xmlns:r="http://schemas.openxmlformats.org/officeDocument/2006/relationships" xmlns:p="http://schemas.openxmlformats.org/presentationml/2006/main">
   <p:cSld>
     <p:spTree>
@@ -3415,7 +3817,7 @@
           <a:lstStyle/>
           <a:p>
             <a:r>
-              <a:rPr lang="en-US" dirty="0" smtClean="0"/>
+              <a:rPr lang="en-US" dirty="0"/>
               <a:t>Statistics L3</a:t>
             </a:r>
             <a:endParaRPr lang="cs-CZ" dirty="0"/>
@@ -3442,6 +3844,36 @@
           <a:xfrm>
             <a:off x="5016671" y="0"/>
             <a:ext cx="7175329" cy="6663275"/>
+          </a:xfrm>
+          <a:prstGeom prst="rect">
+            <a:avLst/>
+          </a:prstGeom>
+        </p:spPr>
+      </p:pic>
+      <p:pic>
+        <p:nvPicPr>
+          <p:cNvPr id="3" name="Imagen 2">
+            <a:extLst>
+              <a:ext uri="{FF2B5EF4-FFF2-40B4-BE49-F238E27FC236}">
+                <a16:creationId xmlns:a16="http://schemas.microsoft.com/office/drawing/2014/main" id="{70FE3505-2832-17D5-FAA4-5C84D05B3612}"/>
+              </a:ext>
+            </a:extLst>
+          </p:cNvPr>
+          <p:cNvPicPr>
+            <a:picLocks noChangeAspect="1"/>
+          </p:cNvPicPr>
+          <p:nvPr/>
+        </p:nvPicPr>
+        <p:blipFill>
+          <a:blip r:embed="rId3"/>
+          <a:stretch>
+            <a:fillRect/>
+          </a:stretch>
+        </p:blipFill>
+        <p:spPr>
+          <a:xfrm>
+            <a:off x="3047736" y="1714351"/>
+            <a:ext cx="6096528" cy="3429297"/>
           </a:xfrm>
           <a:prstGeom prst="rect">
             <a:avLst/>
@@ -3461,12 +3893,26 @@
 </p:sld>
 </file>
 
-<file path=ppt/slides/slide6.xml><?xml version="1.0" encoding="utf-8"?>
+<file path=ppt/slides/slide7.xml><?xml version="1.0" encoding="utf-8"?>
 <p:sld xmlns:a="http://schemas.openxmlformats.org/drawingml/2006/main" xmlns:r="http://schemas.openxmlformats.org/officeDocument/2006/relationships" xmlns:p="http://schemas.openxmlformats.org/presentationml/2006/main">
   <p:cSld>
+    <p:bg>
+      <p:bgPr>
+        <a:solidFill>
+          <a:schemeClr val="bg1"/>
+        </a:solidFill>
+        <a:effectLst/>
+      </p:bgPr>
+    </p:bg>
     <p:spTree>
       <p:nvGrpSpPr>
-        <p:cNvPr id="1" name=""/>
+        <p:cNvPr id="1" name="">
+          <a:extLst>
+            <a:ext uri="{FF2B5EF4-FFF2-40B4-BE49-F238E27FC236}">
+              <a16:creationId xmlns:a16="http://schemas.microsoft.com/office/drawing/2014/main" id="{F697EDE3-0F5B-102E-1075-373E086213EA}"/>
+            </a:ext>
+          </a:extLst>
+        </p:cNvPr>
         <p:cNvGrpSpPr/>
         <p:nvPr/>
       </p:nvGrpSpPr>
@@ -3478,9 +3924,75 @@
           <a:chExt cx="0" cy="0"/>
         </a:xfrm>
       </p:grpSpPr>
-      <p:sp>
-        <p:nvSpPr>
-          <p:cNvPr id="2" name="Nadpis 1"/>
+      <p:sp useBgFill="1">
+        <p:nvSpPr>
+          <p:cNvPr id="14" name="Rectangle 13">
+            <a:extLst>
+              <a:ext uri="{FF2B5EF4-FFF2-40B4-BE49-F238E27FC236}">
+                <a16:creationId xmlns:a16="http://schemas.microsoft.com/office/drawing/2014/main" id="{022BDE4A-8A20-4A69-9C5A-581C82036A4D}"/>
+              </a:ext>
+              <a:ext uri="{C183D7F6-B498-43B3-948B-1728B52AA6E4}">
+                <adec:decorative xmlns:adec="http://schemas.microsoft.com/office/drawing/2017/decorative" val="1"/>
+              </a:ext>
+            </a:extLst>
+          </p:cNvPr>
+          <p:cNvSpPr>
+            <a:spLocks noGrp="1" noRot="1" noChangeAspect="1" noMove="1" noResize="1" noEditPoints="1" noAdjustHandles="1" noChangeArrowheads="1" noChangeShapeType="1" noTextEdit="1"/>
+          </p:cNvSpPr>
+          <p:nvPr>
+            <p:extLst>
+              <p:ext uri="{386F3935-93C4-4BCD-93E2-E3B085C9AB24}">
+                <p16:designElem xmlns:p16="http://schemas.microsoft.com/office/powerpoint/2015/main" val="1"/>
+              </p:ext>
+            </p:extLst>
+          </p:nvPr>
+        </p:nvSpPr>
+        <p:spPr>
+          <a:xfrm>
+            <a:off x="-1" y="0"/>
+            <a:ext cx="12188952" cy="6858000"/>
+          </a:xfrm>
+          <a:prstGeom prst="rect">
+            <a:avLst/>
+          </a:prstGeom>
+          <a:ln>
+            <a:noFill/>
+          </a:ln>
+        </p:spPr>
+        <p:style>
+          <a:lnRef idx="2">
+            <a:schemeClr val="accent1">
+              <a:shade val="50000"/>
+            </a:schemeClr>
+          </a:lnRef>
+          <a:fillRef idx="1">
+            <a:schemeClr val="accent1"/>
+          </a:fillRef>
+          <a:effectRef idx="0">
+            <a:schemeClr val="accent1"/>
+          </a:effectRef>
+          <a:fontRef idx="minor">
+            <a:schemeClr val="lt1"/>
+          </a:fontRef>
+        </p:style>
+        <p:txBody>
+          <a:bodyPr rtlCol="0" anchor="ctr"/>
+          <a:lstStyle/>
+          <a:p>
+            <a:pPr algn="ctr"/>
+            <a:endParaRPr lang="en-US"/>
+          </a:p>
+        </p:txBody>
+      </p:sp>
+      <p:sp>
+        <p:nvSpPr>
+          <p:cNvPr id="2" name="Nadpis 1">
+            <a:extLst>
+              <a:ext uri="{FF2B5EF4-FFF2-40B4-BE49-F238E27FC236}">
+                <a16:creationId xmlns:a16="http://schemas.microsoft.com/office/drawing/2014/main" id="{833D3A3F-DE7C-C301-BA9A-40CCD22C666D}"/>
+              </a:ext>
+            </a:extLst>
+          </p:cNvPr>
           <p:cNvSpPr>
             <a:spLocks noGrp="1"/>
           </p:cNvSpPr>
@@ -3488,22 +4000,42 @@
             <p:ph type="title"/>
           </p:nvPr>
         </p:nvSpPr>
-        <p:spPr/>
-        <p:txBody>
-          <a:bodyPr/>
-          <a:lstStyle/>
-          <a:p>
-            <a:r>
-              <a:rPr lang="en-US" dirty="0" smtClean="0"/>
-              <a:t>Dynamic diagram – Office hours (Iker)</a:t>
-            </a:r>
-            <a:endParaRPr lang="cs-CZ" dirty="0"/>
+        <p:spPr>
+          <a:xfrm>
+            <a:off x="1001684" y="170412"/>
+            <a:ext cx="10178934" cy="1328730"/>
+          </a:xfrm>
+        </p:spPr>
+        <p:txBody>
+          <a:bodyPr vert="horz" lIns="91440" tIns="45720" rIns="91440" bIns="45720" rtlCol="0" anchor="b">
+            <a:normAutofit/>
+          </a:bodyPr>
+          <a:lstStyle/>
+          <a:p>
+            <a:pPr algn="ctr"/>
+            <a:r>
+              <a:rPr lang="en-US" sz="5200" kern="1200">
+                <a:solidFill>
+                  <a:schemeClr val="tx1"/>
+                </a:solidFill>
+                <a:latin typeface="+mj-lt"/>
+                <a:ea typeface="+mj-ea"/>
+                <a:cs typeface="+mj-cs"/>
+              </a:rPr>
+              <a:t>L3 diagram – Office hours</a:t>
+            </a:r>
           </a:p>
         </p:txBody>
       </p:sp>
       <p:pic>
         <p:nvPicPr>
-          <p:cNvPr id="4" name="Zástupný symbol pro obsah 3"/>
+          <p:cNvPr id="9" name="Marcador de contenido 8">
+            <a:extLst>
+              <a:ext uri="{FF2B5EF4-FFF2-40B4-BE49-F238E27FC236}">
+                <a16:creationId xmlns:a16="http://schemas.microsoft.com/office/drawing/2014/main" id="{E2E043D0-5080-A83B-1219-A05981200FEB}"/>
+              </a:ext>
+            </a:extLst>
+          </p:cNvPr>
           <p:cNvPicPr>
             <a:picLocks noGrp="1" noChangeAspect="1"/>
           </p:cNvPicPr>
@@ -3513,14 +4045,46 @@
         </p:nvPicPr>
         <p:blipFill>
           <a:blip r:embed="rId2"/>
+          <a:srcRect t="9692" r="-2" b="22075"/>
           <a:stretch>
             <a:fillRect/>
           </a:stretch>
         </p:blipFill>
         <p:spPr>
           <a:xfrm>
-            <a:off x="2102125" y="1825625"/>
-            <a:ext cx="7987750" cy="4351338"/>
+            <a:off x="198741" y="2410448"/>
+            <a:ext cx="5803323" cy="3890357"/>
+          </a:xfrm>
+          <a:prstGeom prst="rect">
+            <a:avLst/>
+          </a:prstGeom>
+        </p:spPr>
+      </p:pic>
+      <p:pic>
+        <p:nvPicPr>
+          <p:cNvPr id="7" name="Imagen 6">
+            <a:extLst>
+              <a:ext uri="{FF2B5EF4-FFF2-40B4-BE49-F238E27FC236}">
+                <a16:creationId xmlns:a16="http://schemas.microsoft.com/office/drawing/2014/main" id="{0FBF5F8E-8772-5A2D-7036-36CC5F7A5DDC}"/>
+              </a:ext>
+            </a:extLst>
+          </p:cNvPr>
+          <p:cNvPicPr>
+            <a:picLocks noChangeAspect="1"/>
+          </p:cNvPicPr>
+          <p:nvPr/>
+        </p:nvPicPr>
+        <p:blipFill>
+          <a:blip r:embed="rId3"/>
+          <a:srcRect t="27300" r="-1" b="23260"/>
+          <a:stretch>
+            <a:fillRect/>
+          </a:stretch>
+        </p:blipFill>
+        <p:spPr>
+          <a:xfrm>
+            <a:off x="6189934" y="2410448"/>
+            <a:ext cx="5803323" cy="3890357"/>
           </a:xfrm>
           <a:prstGeom prst="rect">
             <a:avLst/>
@@ -3530,86 +4094,7 @@
     </p:spTree>
     <p:extLst>
       <p:ext uri="{BB962C8B-B14F-4D97-AF65-F5344CB8AC3E}">
-        <p14:creationId xmlns:p14="http://schemas.microsoft.com/office/powerpoint/2010/main" val="156025415"/>
-      </p:ext>
-    </p:extLst>
-  </p:cSld>
-  <p:clrMapOvr>
-    <a:masterClrMapping/>
-  </p:clrMapOvr>
-</p:sld>
-</file>
-
-<file path=ppt/slides/slide7.xml><?xml version="1.0" encoding="utf-8"?>
-<p:sld xmlns:a="http://schemas.openxmlformats.org/drawingml/2006/main" xmlns:r="http://schemas.openxmlformats.org/officeDocument/2006/relationships" xmlns:p="http://schemas.openxmlformats.org/presentationml/2006/main">
-  <p:cSld>
-    <p:spTree>
-      <p:nvGrpSpPr>
-        <p:cNvPr id="1" name=""/>
-        <p:cNvGrpSpPr/>
-        <p:nvPr/>
-      </p:nvGrpSpPr>
-      <p:grpSpPr>
-        <a:xfrm>
-          <a:off x="0" y="0"/>
-          <a:ext cx="0" cy="0"/>
-          <a:chOff x="0" y="0"/>
-          <a:chExt cx="0" cy="0"/>
-        </a:xfrm>
-      </p:grpSpPr>
-      <p:sp>
-        <p:nvSpPr>
-          <p:cNvPr id="2" name="Nadpis 1"/>
-          <p:cNvSpPr>
-            <a:spLocks noGrp="1"/>
-          </p:cNvSpPr>
-          <p:nvPr>
-            <p:ph type="title"/>
-          </p:nvPr>
-        </p:nvSpPr>
-        <p:spPr/>
-        <p:txBody>
-          <a:bodyPr/>
-          <a:lstStyle/>
-          <a:p>
-            <a:r>
-              <a:rPr lang="en-US" dirty="0" smtClean="0"/>
-              <a:t>Deployment diagram(Martin)</a:t>
-            </a:r>
-            <a:endParaRPr lang="cs-CZ" dirty="0"/>
-          </a:p>
-        </p:txBody>
-      </p:sp>
-      <p:pic>
-        <p:nvPicPr>
-          <p:cNvPr id="4" name="Zástupný symbol pro obsah 3"/>
-          <p:cNvPicPr>
-            <a:picLocks noGrp="1" noChangeAspect="1"/>
-          </p:cNvPicPr>
-          <p:nvPr>
-            <p:ph idx="1"/>
-          </p:nvPr>
-        </p:nvPicPr>
-        <p:blipFill>
-          <a:blip r:embed="rId2"/>
-          <a:stretch>
-            <a:fillRect/>
-          </a:stretch>
-        </p:blipFill>
-        <p:spPr>
-          <a:xfrm>
-            <a:off x="0" y="2005263"/>
-            <a:ext cx="12192000" cy="4034589"/>
-          </a:xfrm>
-          <a:prstGeom prst="rect">
-            <a:avLst/>
-          </a:prstGeom>
-        </p:spPr>
-      </p:pic>
-    </p:spTree>
-    <p:extLst>
-      <p:ext uri="{BB962C8B-B14F-4D97-AF65-F5344CB8AC3E}">
-        <p14:creationId xmlns:p14="http://schemas.microsoft.com/office/powerpoint/2010/main" val="1413589051"/>
+        <p14:creationId xmlns:p14="http://schemas.microsoft.com/office/powerpoint/2010/main" val="2948255022"/>
       </p:ext>
     </p:extLst>
   </p:cSld>
@@ -3643,45 +4128,131 @@
             <a:spLocks noGrp="1"/>
           </p:cNvSpPr>
           <p:nvPr>
-            <p:ph type="ctrTitle"/>
-          </p:nvPr>
-        </p:nvSpPr>
-        <p:spPr/>
-        <p:txBody>
-          <a:bodyPr/>
-          <a:lstStyle/>
-          <a:p>
-            <a:r>
-              <a:rPr lang="en-US" dirty="0" smtClean="0"/>
-              <a:t>Thank you</a:t>
+            <p:ph type="title"/>
+          </p:nvPr>
+        </p:nvSpPr>
+        <p:spPr/>
+        <p:txBody>
+          <a:bodyPr/>
+          <a:lstStyle/>
+          <a:p>
+            <a:r>
+              <a:rPr lang="en-US" dirty="0"/>
+              <a:t>Dynamic diagram – Office hours</a:t>
             </a:r>
             <a:endParaRPr lang="cs-CZ" dirty="0"/>
           </a:p>
         </p:txBody>
       </p:sp>
-      <p:sp>
-        <p:nvSpPr>
-          <p:cNvPr id="3" name="Podnadpis 2"/>
-          <p:cNvSpPr>
-            <a:spLocks noGrp="1"/>
-          </p:cNvSpPr>
-          <p:nvPr>
-            <p:ph type="subTitle" idx="1"/>
-          </p:nvPr>
-        </p:nvSpPr>
-        <p:spPr/>
-        <p:txBody>
-          <a:bodyPr/>
-          <a:lstStyle/>
-          <a:p>
-            <a:endParaRPr lang="cs-CZ" dirty="0"/>
-          </a:p>
-        </p:txBody>
-      </p:sp>
+      <p:pic>
+        <p:nvPicPr>
+          <p:cNvPr id="4" name="Zástupný symbol pro obsah 3"/>
+          <p:cNvPicPr>
+            <a:picLocks noGrp="1" noChangeAspect="1"/>
+          </p:cNvPicPr>
+          <p:nvPr>
+            <p:ph idx="1"/>
+          </p:nvPr>
+        </p:nvPicPr>
+        <p:blipFill>
+          <a:blip r:embed="rId2"/>
+          <a:stretch>
+            <a:fillRect/>
+          </a:stretch>
+        </p:blipFill>
+        <p:spPr>
+          <a:xfrm>
+            <a:off x="1015482" y="1322761"/>
+            <a:ext cx="10161036" cy="5535239"/>
+          </a:xfrm>
+          <a:prstGeom prst="rect">
+            <a:avLst/>
+          </a:prstGeom>
+        </p:spPr>
+      </p:pic>
     </p:spTree>
     <p:extLst>
       <p:ext uri="{BB962C8B-B14F-4D97-AF65-F5344CB8AC3E}">
-        <p14:creationId xmlns:p14="http://schemas.microsoft.com/office/powerpoint/2010/main" val="2724615140"/>
+        <p14:creationId xmlns:p14="http://schemas.microsoft.com/office/powerpoint/2010/main" val="156025415"/>
+      </p:ext>
+    </p:extLst>
+  </p:cSld>
+  <p:clrMapOvr>
+    <a:masterClrMapping/>
+  </p:clrMapOvr>
+</p:sld>
+</file>
+
+<file path=ppt/slides/slide9.xml><?xml version="1.0" encoding="utf-8"?>
+<p:sld xmlns:a="http://schemas.openxmlformats.org/drawingml/2006/main" xmlns:r="http://schemas.openxmlformats.org/officeDocument/2006/relationships" xmlns:p="http://schemas.openxmlformats.org/presentationml/2006/main">
+  <p:cSld>
+    <p:spTree>
+      <p:nvGrpSpPr>
+        <p:cNvPr id="1" name=""/>
+        <p:cNvGrpSpPr/>
+        <p:nvPr/>
+      </p:nvGrpSpPr>
+      <p:grpSpPr>
+        <a:xfrm>
+          <a:off x="0" y="0"/>
+          <a:ext cx="0" cy="0"/>
+          <a:chOff x="0" y="0"/>
+          <a:chExt cx="0" cy="0"/>
+        </a:xfrm>
+      </p:grpSpPr>
+      <p:sp>
+        <p:nvSpPr>
+          <p:cNvPr id="2" name="Nadpis 1"/>
+          <p:cNvSpPr>
+            <a:spLocks noGrp="1"/>
+          </p:cNvSpPr>
+          <p:nvPr>
+            <p:ph type="title"/>
+          </p:nvPr>
+        </p:nvSpPr>
+        <p:spPr/>
+        <p:txBody>
+          <a:bodyPr/>
+          <a:lstStyle/>
+          <a:p>
+            <a:r>
+              <a:rPr lang="en-US" dirty="0"/>
+              <a:t>Deployment diagram(Martin)</a:t>
+            </a:r>
+            <a:endParaRPr lang="cs-CZ" dirty="0"/>
+          </a:p>
+        </p:txBody>
+      </p:sp>
+      <p:pic>
+        <p:nvPicPr>
+          <p:cNvPr id="4" name="Zástupný symbol pro obsah 3"/>
+          <p:cNvPicPr>
+            <a:picLocks noGrp="1" noChangeAspect="1"/>
+          </p:cNvPicPr>
+          <p:nvPr>
+            <p:ph idx="1"/>
+          </p:nvPr>
+        </p:nvPicPr>
+        <p:blipFill>
+          <a:blip r:embed="rId2"/>
+          <a:stretch>
+            <a:fillRect/>
+          </a:stretch>
+        </p:blipFill>
+        <p:spPr>
+          <a:xfrm>
+            <a:off x="0" y="2005263"/>
+            <a:ext cx="12192000" cy="4034589"/>
+          </a:xfrm>
+          <a:prstGeom prst="rect">
+            <a:avLst/>
+          </a:prstGeom>
+        </p:spPr>
+      </p:pic>
+    </p:spTree>
+    <p:extLst>
+      <p:ext uri="{BB962C8B-B14F-4D97-AF65-F5344CB8AC3E}">
+        <p14:creationId xmlns:p14="http://schemas.microsoft.com/office/powerpoint/2010/main" val="1413589051"/>
       </p:ext>
     </p:extLst>
   </p:cSld>

--- a/Schedules 1.pptx
+++ b/Schedules 1.pptx
@@ -8,13 +8,17 @@
     <p:sldId id="256" r:id="rId2"/>
     <p:sldId id="260" r:id="rId3"/>
     <p:sldId id="265" r:id="rId4"/>
-    <p:sldId id="257" r:id="rId5"/>
-    <p:sldId id="258" r:id="rId6"/>
-    <p:sldId id="259" r:id="rId7"/>
-    <p:sldId id="264" r:id="rId8"/>
-    <p:sldId id="263" r:id="rId9"/>
-    <p:sldId id="262" r:id="rId10"/>
-    <p:sldId id="261" r:id="rId11"/>
+    <p:sldId id="266" r:id="rId5"/>
+    <p:sldId id="267" r:id="rId6"/>
+    <p:sldId id="268" r:id="rId7"/>
+    <p:sldId id="257" r:id="rId8"/>
+    <p:sldId id="258" r:id="rId9"/>
+    <p:sldId id="259" r:id="rId10"/>
+    <p:sldId id="264" r:id="rId11"/>
+    <p:sldId id="263" r:id="rId12"/>
+    <p:sldId id="269" r:id="rId13"/>
+    <p:sldId id="262" r:id="rId14"/>
+    <p:sldId id="261" r:id="rId15"/>
   </p:sldIdLst>
   <p:sldSz cx="12192000" cy="6858000"/>
   <p:notesSz cx="6858000" cy="9144000"/>
@@ -454,7 +458,7 @@
           <a:p>
             <a:fld id="{D5632909-F848-46C4-A1DA-D7EC428885C6}" type="slidenum">
               <a:rPr lang="cs-CZ" smtClean="0"/>
-              <a:t>‹Nº›</a:t>
+              <a:t>‹#›</a:t>
             </a:fld>
             <a:endParaRPr lang="cs-CZ"/>
           </a:p>
@@ -622,7 +626,7 @@
           <a:p>
             <a:fld id="{D5632909-F848-46C4-A1DA-D7EC428885C6}" type="slidenum">
               <a:rPr lang="cs-CZ" smtClean="0"/>
-              <a:t>‹Nº›</a:t>
+              <a:t>‹#›</a:t>
             </a:fld>
             <a:endParaRPr lang="cs-CZ"/>
           </a:p>
@@ -800,7 +804,7 @@
           <a:p>
             <a:fld id="{D5632909-F848-46C4-A1DA-D7EC428885C6}" type="slidenum">
               <a:rPr lang="cs-CZ" smtClean="0"/>
-              <a:t>‹Nº›</a:t>
+              <a:t>‹#›</a:t>
             </a:fld>
             <a:endParaRPr lang="cs-CZ"/>
           </a:p>
@@ -968,7 +972,7 @@
           <a:p>
             <a:fld id="{D5632909-F848-46C4-A1DA-D7EC428885C6}" type="slidenum">
               <a:rPr lang="cs-CZ" smtClean="0"/>
-              <a:t>‹Nº›</a:t>
+              <a:t>‹#›</a:t>
             </a:fld>
             <a:endParaRPr lang="cs-CZ"/>
           </a:p>
@@ -1213,7 +1217,7 @@
           <a:p>
             <a:fld id="{D5632909-F848-46C4-A1DA-D7EC428885C6}" type="slidenum">
               <a:rPr lang="cs-CZ" smtClean="0"/>
-              <a:t>‹Nº›</a:t>
+              <a:t>‹#›</a:t>
             </a:fld>
             <a:endParaRPr lang="cs-CZ"/>
           </a:p>
@@ -1442,7 +1446,7 @@
           <a:p>
             <a:fld id="{D5632909-F848-46C4-A1DA-D7EC428885C6}" type="slidenum">
               <a:rPr lang="cs-CZ" smtClean="0"/>
-              <a:t>‹Nº›</a:t>
+              <a:t>‹#›</a:t>
             </a:fld>
             <a:endParaRPr lang="cs-CZ"/>
           </a:p>
@@ -1806,7 +1810,7 @@
           <a:p>
             <a:fld id="{D5632909-F848-46C4-A1DA-D7EC428885C6}" type="slidenum">
               <a:rPr lang="cs-CZ" smtClean="0"/>
-              <a:t>‹Nº›</a:t>
+              <a:t>‹#›</a:t>
             </a:fld>
             <a:endParaRPr lang="cs-CZ"/>
           </a:p>
@@ -1923,7 +1927,7 @@
           <a:p>
             <a:fld id="{D5632909-F848-46C4-A1DA-D7EC428885C6}" type="slidenum">
               <a:rPr lang="cs-CZ" smtClean="0"/>
-              <a:t>‹Nº›</a:t>
+              <a:t>‹#›</a:t>
             </a:fld>
             <a:endParaRPr lang="cs-CZ"/>
           </a:p>
@@ -2018,7 +2022,7 @@
           <a:p>
             <a:fld id="{D5632909-F848-46C4-A1DA-D7EC428885C6}" type="slidenum">
               <a:rPr lang="cs-CZ" smtClean="0"/>
-              <a:t>‹Nº›</a:t>
+              <a:t>‹#›</a:t>
             </a:fld>
             <a:endParaRPr lang="cs-CZ"/>
           </a:p>
@@ -2293,7 +2297,7 @@
           <a:p>
             <a:fld id="{D5632909-F848-46C4-A1DA-D7EC428885C6}" type="slidenum">
               <a:rPr lang="cs-CZ" smtClean="0"/>
-              <a:t>‹Nº›</a:t>
+              <a:t>‹#›</a:t>
             </a:fld>
             <a:endParaRPr lang="cs-CZ"/>
           </a:p>
@@ -2545,7 +2549,7 @@
           <a:p>
             <a:fld id="{D5632909-F848-46C4-A1DA-D7EC428885C6}" type="slidenum">
               <a:rPr lang="cs-CZ" smtClean="0"/>
-              <a:t>‹Nº›</a:t>
+              <a:t>‹#›</a:t>
             </a:fld>
             <a:endParaRPr lang="cs-CZ"/>
           </a:p>
@@ -2792,7 +2796,7 @@
           <a:p>
             <a:fld id="{D5632909-F848-46C4-A1DA-D7EC428885C6}" type="slidenum">
               <a:rPr lang="cs-CZ" smtClean="0"/>
-              <a:t>‹Nº›</a:t>
+              <a:t>‹#›</a:t>
             </a:fld>
             <a:endParaRPr lang="cs-CZ"/>
           </a:p>
@@ -3222,6 +3226,213 @@
 <file path=ppt/slides/slide10.xml><?xml version="1.0" encoding="utf-8"?>
 <p:sld xmlns:a="http://schemas.openxmlformats.org/drawingml/2006/main" xmlns:r="http://schemas.openxmlformats.org/officeDocument/2006/relationships" xmlns:p="http://schemas.openxmlformats.org/presentationml/2006/main">
   <p:cSld>
+    <p:bg>
+      <p:bgPr>
+        <a:solidFill>
+          <a:schemeClr val="bg1"/>
+        </a:solidFill>
+        <a:effectLst/>
+      </p:bgPr>
+    </p:bg>
+    <p:spTree>
+      <p:nvGrpSpPr>
+        <p:cNvPr id="1" name="">
+          <a:extLst>
+            <a:ext uri="{FF2B5EF4-FFF2-40B4-BE49-F238E27FC236}">
+              <a16:creationId xmlns:a16="http://schemas.microsoft.com/office/drawing/2014/main" id="{F697EDE3-0F5B-102E-1075-373E086213EA}"/>
+            </a:ext>
+          </a:extLst>
+        </p:cNvPr>
+        <p:cNvGrpSpPr/>
+        <p:nvPr/>
+      </p:nvGrpSpPr>
+      <p:grpSpPr>
+        <a:xfrm>
+          <a:off x="0" y="0"/>
+          <a:ext cx="0" cy="0"/>
+          <a:chOff x="0" y="0"/>
+          <a:chExt cx="0" cy="0"/>
+        </a:xfrm>
+      </p:grpSpPr>
+      <p:sp useBgFill="1">
+        <p:nvSpPr>
+          <p:cNvPr id="14" name="Rectangle 13">
+            <a:extLst>
+              <a:ext uri="{FF2B5EF4-FFF2-40B4-BE49-F238E27FC236}">
+                <a16:creationId xmlns:a16="http://schemas.microsoft.com/office/drawing/2014/main" id="{022BDE4A-8A20-4A69-9C5A-581C82036A4D}"/>
+              </a:ext>
+              <a:ext uri="{C183D7F6-B498-43B3-948B-1728B52AA6E4}">
+                <adec:decorative xmlns:adec="http://schemas.microsoft.com/office/drawing/2017/decorative" val="1"/>
+              </a:ext>
+            </a:extLst>
+          </p:cNvPr>
+          <p:cNvSpPr>
+            <a:spLocks noGrp="1" noRot="1" noChangeAspect="1" noMove="1" noResize="1" noEditPoints="1" noAdjustHandles="1" noChangeArrowheads="1" noChangeShapeType="1" noTextEdit="1"/>
+          </p:cNvSpPr>
+          <p:nvPr>
+            <p:extLst>
+              <p:ext uri="{386F3935-93C4-4BCD-93E2-E3B085C9AB24}">
+                <p16:designElem xmlns:p16="http://schemas.microsoft.com/office/powerpoint/2015/main" val="1"/>
+              </p:ext>
+            </p:extLst>
+          </p:nvPr>
+        </p:nvSpPr>
+        <p:spPr>
+          <a:xfrm>
+            <a:off x="-1" y="0"/>
+            <a:ext cx="12188952" cy="6858000"/>
+          </a:xfrm>
+          <a:prstGeom prst="rect">
+            <a:avLst/>
+          </a:prstGeom>
+          <a:ln>
+            <a:noFill/>
+          </a:ln>
+        </p:spPr>
+        <p:style>
+          <a:lnRef idx="2">
+            <a:schemeClr val="accent1">
+              <a:shade val="50000"/>
+            </a:schemeClr>
+          </a:lnRef>
+          <a:fillRef idx="1">
+            <a:schemeClr val="accent1"/>
+          </a:fillRef>
+          <a:effectRef idx="0">
+            <a:schemeClr val="accent1"/>
+          </a:effectRef>
+          <a:fontRef idx="minor">
+            <a:schemeClr val="lt1"/>
+          </a:fontRef>
+        </p:style>
+        <p:txBody>
+          <a:bodyPr rtlCol="0" anchor="ctr"/>
+          <a:lstStyle/>
+          <a:p>
+            <a:pPr algn="ctr"/>
+            <a:endParaRPr lang="en-US"/>
+          </a:p>
+        </p:txBody>
+      </p:sp>
+      <p:sp>
+        <p:nvSpPr>
+          <p:cNvPr id="2" name="Nadpis 1">
+            <a:extLst>
+              <a:ext uri="{FF2B5EF4-FFF2-40B4-BE49-F238E27FC236}">
+                <a16:creationId xmlns:a16="http://schemas.microsoft.com/office/drawing/2014/main" id="{833D3A3F-DE7C-C301-BA9A-40CCD22C666D}"/>
+              </a:ext>
+            </a:extLst>
+          </p:cNvPr>
+          <p:cNvSpPr>
+            <a:spLocks noGrp="1"/>
+          </p:cNvSpPr>
+          <p:nvPr>
+            <p:ph type="title"/>
+          </p:nvPr>
+        </p:nvSpPr>
+        <p:spPr>
+          <a:xfrm>
+            <a:off x="1001684" y="170412"/>
+            <a:ext cx="10178934" cy="670246"/>
+          </a:xfrm>
+        </p:spPr>
+        <p:txBody>
+          <a:bodyPr vert="horz" lIns="91440" tIns="45720" rIns="91440" bIns="45720" rtlCol="0" anchor="b">
+            <a:normAutofit/>
+          </a:bodyPr>
+          <a:lstStyle/>
+          <a:p>
+            <a:pPr algn="ctr"/>
+            <a:r>
+              <a:rPr lang="en-US" sz="4000" kern="1200" dirty="0">
+                <a:solidFill>
+                  <a:schemeClr val="tx1"/>
+                </a:solidFill>
+                <a:latin typeface="+mj-lt"/>
+                <a:ea typeface="+mj-ea"/>
+                <a:cs typeface="+mj-cs"/>
+              </a:rPr>
+              <a:t>L3 diagram – Office hours</a:t>
+            </a:r>
+          </a:p>
+        </p:txBody>
+      </p:sp>
+      <p:pic>
+        <p:nvPicPr>
+          <p:cNvPr id="9" name="Marcador de contenido 8">
+            <a:extLst>
+              <a:ext uri="{FF2B5EF4-FFF2-40B4-BE49-F238E27FC236}">
+                <a16:creationId xmlns:a16="http://schemas.microsoft.com/office/drawing/2014/main" id="{E2E043D0-5080-A83B-1219-A05981200FEB}"/>
+              </a:ext>
+            </a:extLst>
+          </p:cNvPr>
+          <p:cNvPicPr>
+            <a:picLocks noGrp="1" noChangeAspect="1"/>
+          </p:cNvPicPr>
+          <p:nvPr>
+            <p:ph idx="1"/>
+          </p:nvPr>
+        </p:nvPicPr>
+        <p:blipFill rotWithShape="1">
+          <a:blip r:embed="rId2"/>
+          <a:srcRect t="-251" r="-2" b="-114"/>
+          <a:stretch/>
+        </p:blipFill>
+        <p:spPr>
+          <a:xfrm>
+            <a:off x="287828" y="840658"/>
+            <a:ext cx="5803323" cy="5722375"/>
+          </a:xfrm>
+          <a:prstGeom prst="rect">
+            <a:avLst/>
+          </a:prstGeom>
+        </p:spPr>
+      </p:pic>
+      <p:pic>
+        <p:nvPicPr>
+          <p:cNvPr id="7" name="Imagen 6">
+            <a:extLst>
+              <a:ext uri="{FF2B5EF4-FFF2-40B4-BE49-F238E27FC236}">
+                <a16:creationId xmlns:a16="http://schemas.microsoft.com/office/drawing/2014/main" id="{0FBF5F8E-8772-5A2D-7036-36CC5F7A5DDC}"/>
+              </a:ext>
+            </a:extLst>
+          </p:cNvPr>
+          <p:cNvPicPr>
+            <a:picLocks noChangeAspect="1"/>
+          </p:cNvPicPr>
+          <p:nvPr/>
+        </p:nvPicPr>
+        <p:blipFill rotWithShape="1">
+          <a:blip r:embed="rId3"/>
+          <a:srcRect t="418" b="60"/>
+          <a:stretch/>
+        </p:blipFill>
+        <p:spPr>
+          <a:xfrm>
+            <a:off x="7092836" y="840658"/>
+            <a:ext cx="4459051" cy="6017342"/>
+          </a:xfrm>
+          <a:prstGeom prst="rect">
+            <a:avLst/>
+          </a:prstGeom>
+        </p:spPr>
+      </p:pic>
+    </p:spTree>
+    <p:extLst>
+      <p:ext uri="{BB962C8B-B14F-4D97-AF65-F5344CB8AC3E}">
+        <p14:creationId xmlns:p14="http://schemas.microsoft.com/office/powerpoint/2010/main" val="2948255022"/>
+      </p:ext>
+    </p:extLst>
+  </p:cSld>
+  <p:clrMapOvr>
+    <a:masterClrMapping/>
+  </p:clrMapOvr>
+</p:sld>
+</file>
+
+<file path=ppt/slides/slide11.xml><?xml version="1.0" encoding="utf-8"?>
+<p:sld xmlns:a="http://schemas.openxmlformats.org/drawingml/2006/main" xmlns:r="http://schemas.openxmlformats.org/officeDocument/2006/relationships" xmlns:p="http://schemas.openxmlformats.org/presentationml/2006/main">
+  <p:cSld>
     <p:spTree>
       <p:nvGrpSpPr>
         <p:cNvPr id="1" name=""/>
@@ -3243,10 +3454,273 @@
             <a:spLocks noGrp="1"/>
           </p:cNvSpPr>
           <p:nvPr>
+            <p:ph type="title"/>
+          </p:nvPr>
+        </p:nvSpPr>
+        <p:spPr/>
+        <p:txBody>
+          <a:bodyPr/>
+          <a:lstStyle/>
+          <a:p>
+            <a:r>
+              <a:rPr lang="en-US" dirty="0"/>
+              <a:t>Dynamic diagram – Office hours</a:t>
+            </a:r>
+            <a:endParaRPr lang="cs-CZ" dirty="0"/>
+          </a:p>
+        </p:txBody>
+      </p:sp>
+      <p:pic>
+        <p:nvPicPr>
+          <p:cNvPr id="4" name="Zástupný symbol pro obsah 3"/>
+          <p:cNvPicPr>
+            <a:picLocks noGrp="1" noChangeAspect="1"/>
+          </p:cNvPicPr>
+          <p:nvPr>
+            <p:ph idx="1"/>
+          </p:nvPr>
+        </p:nvPicPr>
+        <p:blipFill>
+          <a:blip r:embed="rId2"/>
+          <a:stretch>
+            <a:fillRect/>
+          </a:stretch>
+        </p:blipFill>
+        <p:spPr>
+          <a:xfrm>
+            <a:off x="1015482" y="1322761"/>
+            <a:ext cx="10161036" cy="5535239"/>
+          </a:xfrm>
+          <a:prstGeom prst="rect">
+            <a:avLst/>
+          </a:prstGeom>
+        </p:spPr>
+      </p:pic>
+    </p:spTree>
+    <p:extLst>
+      <p:ext uri="{BB962C8B-B14F-4D97-AF65-F5344CB8AC3E}">
+        <p14:creationId xmlns:p14="http://schemas.microsoft.com/office/powerpoint/2010/main" val="156025415"/>
+      </p:ext>
+    </p:extLst>
+  </p:cSld>
+  <p:clrMapOvr>
+    <a:masterClrMapping/>
+  </p:clrMapOvr>
+</p:sld>
+</file>
+
+<file path=ppt/slides/slide12.xml><?xml version="1.0" encoding="utf-8"?>
+<p:sld xmlns:a="http://schemas.openxmlformats.org/drawingml/2006/main" xmlns:r="http://schemas.openxmlformats.org/officeDocument/2006/relationships" xmlns:p="http://schemas.openxmlformats.org/presentationml/2006/main">
+  <p:cSld>
+    <p:spTree>
+      <p:nvGrpSpPr>
+        <p:cNvPr id="1" name="">
+          <a:extLst>
+            <a:ext uri="{FF2B5EF4-FFF2-40B4-BE49-F238E27FC236}">
+              <a16:creationId xmlns:a16="http://schemas.microsoft.com/office/drawing/2014/main" id="{CF205716-B3C7-19F0-1D23-1B3C7A9E9657}"/>
+            </a:ext>
+          </a:extLst>
+        </p:cNvPr>
+        <p:cNvGrpSpPr/>
+        <p:nvPr/>
+      </p:nvGrpSpPr>
+      <p:grpSpPr>
+        <a:xfrm>
+          <a:off x="0" y="0"/>
+          <a:ext cx="0" cy="0"/>
+          <a:chOff x="0" y="0"/>
+          <a:chExt cx="0" cy="0"/>
+        </a:xfrm>
+      </p:grpSpPr>
+      <p:sp>
+        <p:nvSpPr>
+          <p:cNvPr id="2" name="Nadpis 1">
+            <a:extLst>
+              <a:ext uri="{FF2B5EF4-FFF2-40B4-BE49-F238E27FC236}">
+                <a16:creationId xmlns:a16="http://schemas.microsoft.com/office/drawing/2014/main" id="{BCC45884-D71A-C278-2934-0DD665F85564}"/>
+              </a:ext>
+            </a:extLst>
+          </p:cNvPr>
+          <p:cNvSpPr>
+            <a:spLocks noGrp="1"/>
+          </p:cNvSpPr>
+          <p:nvPr>
+            <p:ph type="title"/>
+          </p:nvPr>
+        </p:nvSpPr>
+        <p:spPr>
+          <a:xfrm>
+            <a:off x="2209800" y="-262083"/>
+            <a:ext cx="10515600" cy="1325563"/>
+          </a:xfrm>
+        </p:spPr>
+        <p:txBody>
+          <a:bodyPr/>
+          <a:lstStyle/>
+          <a:p>
+            <a:r>
+              <a:rPr lang="en-US" dirty="0"/>
+              <a:t>L3 Diagram – Viewing Course info</a:t>
+            </a:r>
+            <a:endParaRPr lang="cs-CZ" dirty="0"/>
+          </a:p>
+        </p:txBody>
+      </p:sp>
+      <p:pic>
+        <p:nvPicPr>
+          <p:cNvPr id="6" name="Picture 5">
+            <a:extLst>
+              <a:ext uri="{FF2B5EF4-FFF2-40B4-BE49-F238E27FC236}">
+                <a16:creationId xmlns:a16="http://schemas.microsoft.com/office/drawing/2014/main" id="{AD778291-FFBC-D3E6-AF11-CB8E527EEEBB}"/>
+              </a:ext>
+            </a:extLst>
+          </p:cNvPr>
+          <p:cNvPicPr>
+            <a:picLocks noChangeAspect="1"/>
+          </p:cNvPicPr>
+          <p:nvPr/>
+        </p:nvPicPr>
+        <p:blipFill>
+          <a:blip r:embed="rId2"/>
+          <a:stretch>
+            <a:fillRect/>
+          </a:stretch>
+        </p:blipFill>
+        <p:spPr>
+          <a:xfrm>
+            <a:off x="2209800" y="1063480"/>
+            <a:ext cx="7772400" cy="5588042"/>
+          </a:xfrm>
+          <a:prstGeom prst="rect">
+            <a:avLst/>
+          </a:prstGeom>
+        </p:spPr>
+      </p:pic>
+    </p:spTree>
+    <p:extLst>
+      <p:ext uri="{BB962C8B-B14F-4D97-AF65-F5344CB8AC3E}">
+        <p14:creationId xmlns:p14="http://schemas.microsoft.com/office/powerpoint/2010/main" val="773652378"/>
+      </p:ext>
+    </p:extLst>
+  </p:cSld>
+  <p:clrMapOvr>
+    <a:masterClrMapping/>
+  </p:clrMapOvr>
+</p:sld>
+</file>
+
+<file path=ppt/slides/slide13.xml><?xml version="1.0" encoding="utf-8"?>
+<p:sld xmlns:a="http://schemas.openxmlformats.org/drawingml/2006/main" xmlns:r="http://schemas.openxmlformats.org/officeDocument/2006/relationships" xmlns:p="http://schemas.openxmlformats.org/presentationml/2006/main">
+  <p:cSld>
+    <p:spTree>
+      <p:nvGrpSpPr>
+        <p:cNvPr id="1" name=""/>
+        <p:cNvGrpSpPr/>
+        <p:nvPr/>
+      </p:nvGrpSpPr>
+      <p:grpSpPr>
+        <a:xfrm>
+          <a:off x="0" y="0"/>
+          <a:ext cx="0" cy="0"/>
+          <a:chOff x="0" y="0"/>
+          <a:chExt cx="0" cy="0"/>
+        </a:xfrm>
+      </p:grpSpPr>
+      <p:sp>
+        <p:nvSpPr>
+          <p:cNvPr id="2" name="Nadpis 1"/>
+          <p:cNvSpPr>
+            <a:spLocks noGrp="1"/>
+          </p:cNvSpPr>
+          <p:nvPr>
+            <p:ph type="title"/>
+          </p:nvPr>
+        </p:nvSpPr>
+        <p:spPr/>
+        <p:txBody>
+          <a:bodyPr/>
+          <a:lstStyle/>
+          <a:p>
+            <a:r>
+              <a:rPr lang="en-US" dirty="0"/>
+              <a:t>Deployment diagram(Martin)</a:t>
+            </a:r>
+            <a:endParaRPr lang="cs-CZ" dirty="0"/>
+          </a:p>
+        </p:txBody>
+      </p:sp>
+      <p:pic>
+        <p:nvPicPr>
+          <p:cNvPr id="4" name="Zástupný symbol pro obsah 3"/>
+          <p:cNvPicPr>
+            <a:picLocks noGrp="1" noChangeAspect="1"/>
+          </p:cNvPicPr>
+          <p:nvPr>
+            <p:ph idx="1"/>
+          </p:nvPr>
+        </p:nvPicPr>
+        <p:blipFill>
+          <a:blip r:embed="rId2"/>
+          <a:stretch>
+            <a:fillRect/>
+          </a:stretch>
+        </p:blipFill>
+        <p:spPr>
+          <a:xfrm>
+            <a:off x="0" y="2005263"/>
+            <a:ext cx="12192000" cy="4034589"/>
+          </a:xfrm>
+          <a:prstGeom prst="rect">
+            <a:avLst/>
+          </a:prstGeom>
+        </p:spPr>
+      </p:pic>
+    </p:spTree>
+    <p:extLst>
+      <p:ext uri="{BB962C8B-B14F-4D97-AF65-F5344CB8AC3E}">
+        <p14:creationId xmlns:p14="http://schemas.microsoft.com/office/powerpoint/2010/main" val="1413589051"/>
+      </p:ext>
+    </p:extLst>
+  </p:cSld>
+  <p:clrMapOvr>
+    <a:masterClrMapping/>
+  </p:clrMapOvr>
+</p:sld>
+</file>
+
+<file path=ppt/slides/slide14.xml><?xml version="1.0" encoding="utf-8"?>
+<p:sld xmlns:a="http://schemas.openxmlformats.org/drawingml/2006/main" xmlns:r="http://schemas.openxmlformats.org/officeDocument/2006/relationships" xmlns:p="http://schemas.openxmlformats.org/presentationml/2006/main">
+  <p:cSld>
+    <p:spTree>
+      <p:nvGrpSpPr>
+        <p:cNvPr id="1" name=""/>
+        <p:cNvGrpSpPr/>
+        <p:nvPr/>
+      </p:nvGrpSpPr>
+      <p:grpSpPr>
+        <a:xfrm>
+          <a:off x="0" y="0"/>
+          <a:ext cx="0" cy="0"/>
+          <a:chOff x="0" y="0"/>
+          <a:chExt cx="0" cy="0"/>
+        </a:xfrm>
+      </p:grpSpPr>
+      <p:sp>
+        <p:nvSpPr>
+          <p:cNvPr id="2" name="Nadpis 1"/>
+          <p:cNvSpPr>
+            <a:spLocks noGrp="1"/>
+          </p:cNvSpPr>
+          <p:nvPr>
             <p:ph type="ctrTitle"/>
           </p:nvPr>
         </p:nvSpPr>
-        <p:spPr/>
+        <p:spPr>
+          <a:xfrm>
+            <a:off x="1524000" y="1505821"/>
+            <a:ext cx="9144000" cy="2387600"/>
+          </a:xfrm>
+        </p:spPr>
         <p:txBody>
           <a:bodyPr/>
           <a:lstStyle/>
@@ -3255,25 +3729,6 @@
               <a:rPr lang="en-US" dirty="0"/>
               <a:t>Thank you</a:t>
             </a:r>
-            <a:endParaRPr lang="cs-CZ" dirty="0"/>
-          </a:p>
-        </p:txBody>
-      </p:sp>
-      <p:sp>
-        <p:nvSpPr>
-          <p:cNvPr id="3" name="Podnadpis 2"/>
-          <p:cNvSpPr>
-            <a:spLocks noGrp="1"/>
-          </p:cNvSpPr>
-          <p:nvPr>
-            <p:ph type="subTitle" idx="1"/>
-          </p:nvPr>
-        </p:nvSpPr>
-        <p:spPr/>
-        <p:txBody>
-          <a:bodyPr/>
-          <a:lstStyle/>
-          <a:p>
             <a:endParaRPr lang="cs-CZ" dirty="0"/>
           </a:p>
         </p:txBody>
@@ -3612,6 +4067,573 @@
 <file path=ppt/slides/slide4.xml><?xml version="1.0" encoding="utf-8"?>
 <p:sld xmlns:a="http://schemas.openxmlformats.org/drawingml/2006/main" xmlns:r="http://schemas.openxmlformats.org/officeDocument/2006/relationships" xmlns:p="http://schemas.openxmlformats.org/presentationml/2006/main">
   <p:cSld>
+    <p:bg>
+      <p:bgPr>
+        <a:solidFill>
+          <a:schemeClr val="bg1"/>
+        </a:solidFill>
+        <a:effectLst/>
+      </p:bgPr>
+    </p:bg>
+    <p:spTree>
+      <p:nvGrpSpPr>
+        <p:cNvPr id="1" name="">
+          <a:extLst>
+            <a:ext uri="{FF2B5EF4-FFF2-40B4-BE49-F238E27FC236}">
+              <a16:creationId xmlns:a16="http://schemas.microsoft.com/office/drawing/2014/main" id="{9B45DFE9-016D-A699-B070-7796E49C0787}"/>
+            </a:ext>
+          </a:extLst>
+        </p:cNvPr>
+        <p:cNvGrpSpPr/>
+        <p:nvPr/>
+      </p:nvGrpSpPr>
+      <p:grpSpPr>
+        <a:xfrm>
+          <a:off x="0" y="0"/>
+          <a:ext cx="0" cy="0"/>
+          <a:chOff x="0" y="0"/>
+          <a:chExt cx="0" cy="0"/>
+        </a:xfrm>
+      </p:grpSpPr>
+      <p:sp useBgFill="1">
+        <p:nvSpPr>
+          <p:cNvPr id="14" name="Rectangle 13">
+            <a:extLst>
+              <a:ext uri="{FF2B5EF4-FFF2-40B4-BE49-F238E27FC236}">
+                <a16:creationId xmlns:a16="http://schemas.microsoft.com/office/drawing/2014/main" id="{3E0E81EA-CDCC-BDEC-B75E-24301CD6A69F}"/>
+              </a:ext>
+              <a:ext uri="{C183D7F6-B498-43B3-948B-1728B52AA6E4}">
+                <adec:decorative xmlns:adec="http://schemas.microsoft.com/office/drawing/2017/decorative" val="1"/>
+              </a:ext>
+            </a:extLst>
+          </p:cNvPr>
+          <p:cNvSpPr>
+            <a:spLocks noGrp="1" noRot="1" noChangeAspect="1" noMove="1" noResize="1" noEditPoints="1" noAdjustHandles="1" noChangeArrowheads="1" noChangeShapeType="1" noTextEdit="1"/>
+          </p:cNvSpPr>
+          <p:nvPr>
+            <p:extLst>
+              <p:ext uri="{386F3935-93C4-4BCD-93E2-E3B085C9AB24}">
+                <p16:designElem xmlns:p16="http://schemas.microsoft.com/office/powerpoint/2015/main" val="1"/>
+              </p:ext>
+            </p:extLst>
+          </p:nvPr>
+        </p:nvSpPr>
+        <p:spPr>
+          <a:xfrm>
+            <a:off x="-1" y="0"/>
+            <a:ext cx="12188952" cy="6858000"/>
+          </a:xfrm>
+          <a:prstGeom prst="rect">
+            <a:avLst/>
+          </a:prstGeom>
+          <a:ln>
+            <a:noFill/>
+          </a:ln>
+        </p:spPr>
+        <p:style>
+          <a:lnRef idx="2">
+            <a:schemeClr val="accent1">
+              <a:shade val="50000"/>
+            </a:schemeClr>
+          </a:lnRef>
+          <a:fillRef idx="1">
+            <a:schemeClr val="accent1"/>
+          </a:fillRef>
+          <a:effectRef idx="0">
+            <a:schemeClr val="accent1"/>
+          </a:effectRef>
+          <a:fontRef idx="minor">
+            <a:schemeClr val="lt1"/>
+          </a:fontRef>
+        </p:style>
+        <p:txBody>
+          <a:bodyPr rtlCol="0" anchor="ctr"/>
+          <a:lstStyle/>
+          <a:p>
+            <a:pPr algn="ctr"/>
+            <a:endParaRPr lang="en-US"/>
+          </a:p>
+        </p:txBody>
+      </p:sp>
+      <p:sp>
+        <p:nvSpPr>
+          <p:cNvPr id="2" name="Nadpis 1">
+            <a:extLst>
+              <a:ext uri="{FF2B5EF4-FFF2-40B4-BE49-F238E27FC236}">
+                <a16:creationId xmlns:a16="http://schemas.microsoft.com/office/drawing/2014/main" id="{47EC0DE2-9A10-10A1-D3AB-3F97C3BB136E}"/>
+              </a:ext>
+            </a:extLst>
+          </p:cNvPr>
+          <p:cNvSpPr>
+            <a:spLocks noGrp="1"/>
+          </p:cNvSpPr>
+          <p:nvPr>
+            <p:ph type="title"/>
+          </p:nvPr>
+        </p:nvSpPr>
+        <p:spPr>
+          <a:xfrm>
+            <a:off x="1001684" y="170412"/>
+            <a:ext cx="10178934" cy="1328730"/>
+          </a:xfrm>
+        </p:spPr>
+        <p:txBody>
+          <a:bodyPr vert="horz" lIns="91440" tIns="45720" rIns="91440" bIns="45720" rtlCol="0" anchor="b">
+            <a:normAutofit fontScale="90000"/>
+          </a:bodyPr>
+          <a:lstStyle/>
+          <a:p>
+            <a:pPr algn="ctr"/>
+            <a:r>
+              <a:rPr lang="en-US" sz="5200" kern="1200" dirty="0">
+                <a:solidFill>
+                  <a:schemeClr val="tx1"/>
+                </a:solidFill>
+                <a:latin typeface="+mj-lt"/>
+                <a:ea typeface="+mj-ea"/>
+                <a:cs typeface="+mj-cs"/>
+              </a:rPr>
+              <a:t>Layered Architecture – </a:t>
+            </a:r>
+            <a:r>
+              <a:rPr lang="en-US" sz="5200" dirty="0"/>
+              <a:t>Viewing the Timetable</a:t>
+            </a:r>
+            <a:endParaRPr lang="en-US" sz="5200" kern="1200" dirty="0">
+              <a:solidFill>
+                <a:schemeClr val="tx1"/>
+              </a:solidFill>
+              <a:latin typeface="+mj-lt"/>
+              <a:ea typeface="+mj-ea"/>
+              <a:cs typeface="+mj-cs"/>
+            </a:endParaRPr>
+          </a:p>
+        </p:txBody>
+      </p:sp>
+      <p:pic>
+        <p:nvPicPr>
+          <p:cNvPr id="3" name="Picture 2">
+            <a:extLst>
+              <a:ext uri="{FF2B5EF4-FFF2-40B4-BE49-F238E27FC236}">
+                <a16:creationId xmlns:a16="http://schemas.microsoft.com/office/drawing/2014/main" id="{3AEA1390-585D-2213-E8C1-551EA40A900E}"/>
+              </a:ext>
+            </a:extLst>
+          </p:cNvPr>
+          <p:cNvPicPr>
+            <a:picLocks noChangeAspect="1"/>
+          </p:cNvPicPr>
+          <p:nvPr/>
+        </p:nvPicPr>
+        <p:blipFill>
+          <a:blip r:embed="rId2"/>
+          <a:stretch>
+            <a:fillRect/>
+          </a:stretch>
+        </p:blipFill>
+        <p:spPr>
+          <a:xfrm>
+            <a:off x="838200" y="1702669"/>
+            <a:ext cx="10334904" cy="4597249"/>
+          </a:xfrm>
+          <a:prstGeom prst="rect">
+            <a:avLst/>
+          </a:prstGeom>
+        </p:spPr>
+      </p:pic>
+    </p:spTree>
+    <p:extLst>
+      <p:ext uri="{BB962C8B-B14F-4D97-AF65-F5344CB8AC3E}">
+        <p14:creationId xmlns:p14="http://schemas.microsoft.com/office/powerpoint/2010/main" val="1758414487"/>
+      </p:ext>
+    </p:extLst>
+  </p:cSld>
+  <p:clrMapOvr>
+    <a:masterClrMapping/>
+  </p:clrMapOvr>
+</p:sld>
+</file>
+
+<file path=ppt/slides/slide5.xml><?xml version="1.0" encoding="utf-8"?>
+<p:sld xmlns:a="http://schemas.openxmlformats.org/drawingml/2006/main" xmlns:r="http://schemas.openxmlformats.org/officeDocument/2006/relationships" xmlns:p="http://schemas.openxmlformats.org/presentationml/2006/main">
+  <p:cSld>
+    <p:bg>
+      <p:bgPr>
+        <a:solidFill>
+          <a:schemeClr val="bg1"/>
+        </a:solidFill>
+        <a:effectLst/>
+      </p:bgPr>
+    </p:bg>
+    <p:spTree>
+      <p:nvGrpSpPr>
+        <p:cNvPr id="1" name="">
+          <a:extLst>
+            <a:ext uri="{FF2B5EF4-FFF2-40B4-BE49-F238E27FC236}">
+              <a16:creationId xmlns:a16="http://schemas.microsoft.com/office/drawing/2014/main" id="{DA5B680D-2346-DDA6-B50C-9D050C79E964}"/>
+            </a:ext>
+          </a:extLst>
+        </p:cNvPr>
+        <p:cNvGrpSpPr/>
+        <p:nvPr/>
+      </p:nvGrpSpPr>
+      <p:grpSpPr>
+        <a:xfrm>
+          <a:off x="0" y="0"/>
+          <a:ext cx="0" cy="0"/>
+          <a:chOff x="0" y="0"/>
+          <a:chExt cx="0" cy="0"/>
+        </a:xfrm>
+      </p:grpSpPr>
+      <p:sp useBgFill="1">
+        <p:nvSpPr>
+          <p:cNvPr id="14" name="Rectangle 13">
+            <a:extLst>
+              <a:ext uri="{FF2B5EF4-FFF2-40B4-BE49-F238E27FC236}">
+                <a16:creationId xmlns:a16="http://schemas.microsoft.com/office/drawing/2014/main" id="{C45B17A5-ADF0-29DA-CDDE-5B7B4E7428EC}"/>
+              </a:ext>
+              <a:ext uri="{C183D7F6-B498-43B3-948B-1728B52AA6E4}">
+                <adec:decorative xmlns:adec="http://schemas.microsoft.com/office/drawing/2017/decorative" val="1"/>
+              </a:ext>
+            </a:extLst>
+          </p:cNvPr>
+          <p:cNvSpPr>
+            <a:spLocks noGrp="1" noRot="1" noChangeAspect="1" noMove="1" noResize="1" noEditPoints="1" noAdjustHandles="1" noChangeArrowheads="1" noChangeShapeType="1" noTextEdit="1"/>
+          </p:cNvSpPr>
+          <p:nvPr>
+            <p:extLst>
+              <p:ext uri="{386F3935-93C4-4BCD-93E2-E3B085C9AB24}">
+                <p16:designElem xmlns:p16="http://schemas.microsoft.com/office/powerpoint/2015/main" val="1"/>
+              </p:ext>
+            </p:extLst>
+          </p:nvPr>
+        </p:nvSpPr>
+        <p:spPr>
+          <a:xfrm>
+            <a:off x="-1" y="0"/>
+            <a:ext cx="12188952" cy="6858000"/>
+          </a:xfrm>
+          <a:prstGeom prst="rect">
+            <a:avLst/>
+          </a:prstGeom>
+          <a:ln>
+            <a:noFill/>
+          </a:ln>
+        </p:spPr>
+        <p:style>
+          <a:lnRef idx="2">
+            <a:schemeClr val="accent1">
+              <a:shade val="50000"/>
+            </a:schemeClr>
+          </a:lnRef>
+          <a:fillRef idx="1">
+            <a:schemeClr val="accent1"/>
+          </a:fillRef>
+          <a:effectRef idx="0">
+            <a:schemeClr val="accent1"/>
+          </a:effectRef>
+          <a:fontRef idx="minor">
+            <a:schemeClr val="lt1"/>
+          </a:fontRef>
+        </p:style>
+        <p:txBody>
+          <a:bodyPr rtlCol="0" anchor="ctr"/>
+          <a:lstStyle/>
+          <a:p>
+            <a:pPr algn="ctr"/>
+            <a:endParaRPr lang="en-US"/>
+          </a:p>
+        </p:txBody>
+      </p:sp>
+      <p:sp>
+        <p:nvSpPr>
+          <p:cNvPr id="2" name="Nadpis 1">
+            <a:extLst>
+              <a:ext uri="{FF2B5EF4-FFF2-40B4-BE49-F238E27FC236}">
+                <a16:creationId xmlns:a16="http://schemas.microsoft.com/office/drawing/2014/main" id="{6A89F61C-67DA-BED6-02B4-3EBD95334CED}"/>
+              </a:ext>
+            </a:extLst>
+          </p:cNvPr>
+          <p:cNvSpPr>
+            <a:spLocks noGrp="1"/>
+          </p:cNvSpPr>
+          <p:nvPr>
+            <p:ph type="title"/>
+          </p:nvPr>
+        </p:nvSpPr>
+        <p:spPr>
+          <a:xfrm>
+            <a:off x="1001684" y="170412"/>
+            <a:ext cx="10178934" cy="1328730"/>
+          </a:xfrm>
+        </p:spPr>
+        <p:txBody>
+          <a:bodyPr vert="horz" lIns="91440" tIns="45720" rIns="91440" bIns="45720" rtlCol="0" anchor="b">
+            <a:normAutofit fontScale="90000"/>
+          </a:bodyPr>
+          <a:lstStyle/>
+          <a:p>
+            <a:pPr algn="ctr"/>
+            <a:r>
+              <a:rPr lang="en-US" sz="5200" kern="1200" dirty="0">
+                <a:solidFill>
+                  <a:schemeClr val="tx1"/>
+                </a:solidFill>
+                <a:latin typeface="+mj-lt"/>
+                <a:ea typeface="+mj-ea"/>
+                <a:cs typeface="+mj-cs"/>
+              </a:rPr>
+              <a:t>Layered Architecture – </a:t>
+            </a:r>
+            <a:r>
+              <a:rPr lang="en-US" sz="5200" dirty="0"/>
+              <a:t>Room Info Description</a:t>
+            </a:r>
+            <a:endParaRPr lang="en-US" sz="5200" kern="1200" dirty="0">
+              <a:solidFill>
+                <a:schemeClr val="tx1"/>
+              </a:solidFill>
+              <a:latin typeface="+mj-lt"/>
+              <a:ea typeface="+mj-ea"/>
+              <a:cs typeface="+mj-cs"/>
+            </a:endParaRPr>
+          </a:p>
+        </p:txBody>
+      </p:sp>
+      <p:pic>
+        <p:nvPicPr>
+          <p:cNvPr id="5" name="Picture 4">
+            <a:extLst>
+              <a:ext uri="{FF2B5EF4-FFF2-40B4-BE49-F238E27FC236}">
+                <a16:creationId xmlns:a16="http://schemas.microsoft.com/office/drawing/2014/main" id="{7CA4FD57-FBC0-1BB8-1E3A-81096CC5235F}"/>
+              </a:ext>
+            </a:extLst>
+          </p:cNvPr>
+          <p:cNvPicPr>
+            <a:picLocks noChangeAspect="1"/>
+          </p:cNvPicPr>
+          <p:nvPr/>
+        </p:nvPicPr>
+        <p:blipFill>
+          <a:blip r:embed="rId2"/>
+          <a:stretch>
+            <a:fillRect/>
+          </a:stretch>
+        </p:blipFill>
+        <p:spPr>
+          <a:xfrm>
+            <a:off x="1668444" y="1499142"/>
+            <a:ext cx="8855111" cy="5082993"/>
+          </a:xfrm>
+          <a:prstGeom prst="rect">
+            <a:avLst/>
+          </a:prstGeom>
+        </p:spPr>
+      </p:pic>
+    </p:spTree>
+    <p:extLst>
+      <p:ext uri="{BB962C8B-B14F-4D97-AF65-F5344CB8AC3E}">
+        <p14:creationId xmlns:p14="http://schemas.microsoft.com/office/powerpoint/2010/main" val="786067541"/>
+      </p:ext>
+    </p:extLst>
+  </p:cSld>
+  <p:clrMapOvr>
+    <a:masterClrMapping/>
+  </p:clrMapOvr>
+</p:sld>
+</file>
+
+<file path=ppt/slides/slide6.xml><?xml version="1.0" encoding="utf-8"?>
+<p:sld xmlns:a="http://schemas.openxmlformats.org/drawingml/2006/main" xmlns:r="http://schemas.openxmlformats.org/officeDocument/2006/relationships" xmlns:p="http://schemas.openxmlformats.org/presentationml/2006/main">
+  <p:cSld>
+    <p:bg>
+      <p:bgPr>
+        <a:solidFill>
+          <a:schemeClr val="bg1"/>
+        </a:solidFill>
+        <a:effectLst/>
+      </p:bgPr>
+    </p:bg>
+    <p:spTree>
+      <p:nvGrpSpPr>
+        <p:cNvPr id="1" name="">
+          <a:extLst>
+            <a:ext uri="{FF2B5EF4-FFF2-40B4-BE49-F238E27FC236}">
+              <a16:creationId xmlns:a16="http://schemas.microsoft.com/office/drawing/2014/main" id="{997CB77F-BC70-5664-7722-A350A824BC81}"/>
+            </a:ext>
+          </a:extLst>
+        </p:cNvPr>
+        <p:cNvGrpSpPr/>
+        <p:nvPr/>
+      </p:nvGrpSpPr>
+      <p:grpSpPr>
+        <a:xfrm>
+          <a:off x="0" y="0"/>
+          <a:ext cx="0" cy="0"/>
+          <a:chOff x="0" y="0"/>
+          <a:chExt cx="0" cy="0"/>
+        </a:xfrm>
+      </p:grpSpPr>
+      <p:sp useBgFill="1">
+        <p:nvSpPr>
+          <p:cNvPr id="14" name="Rectangle 13">
+            <a:extLst>
+              <a:ext uri="{FF2B5EF4-FFF2-40B4-BE49-F238E27FC236}">
+                <a16:creationId xmlns:a16="http://schemas.microsoft.com/office/drawing/2014/main" id="{92CE8417-CC01-2F30-81F2-BDBBBD755421}"/>
+              </a:ext>
+              <a:ext uri="{C183D7F6-B498-43B3-948B-1728B52AA6E4}">
+                <adec:decorative xmlns:adec="http://schemas.microsoft.com/office/drawing/2017/decorative" val="1"/>
+              </a:ext>
+            </a:extLst>
+          </p:cNvPr>
+          <p:cNvSpPr>
+            <a:spLocks noGrp="1" noRot="1" noChangeAspect="1" noMove="1" noResize="1" noEditPoints="1" noAdjustHandles="1" noChangeArrowheads="1" noChangeShapeType="1" noTextEdit="1"/>
+          </p:cNvSpPr>
+          <p:nvPr>
+            <p:extLst>
+              <p:ext uri="{386F3935-93C4-4BCD-93E2-E3B085C9AB24}">
+                <p16:designElem xmlns:p16="http://schemas.microsoft.com/office/powerpoint/2015/main" val="1"/>
+              </p:ext>
+            </p:extLst>
+          </p:nvPr>
+        </p:nvSpPr>
+        <p:spPr>
+          <a:xfrm>
+            <a:off x="-1" y="0"/>
+            <a:ext cx="12188952" cy="6858000"/>
+          </a:xfrm>
+          <a:prstGeom prst="rect">
+            <a:avLst/>
+          </a:prstGeom>
+          <a:ln>
+            <a:noFill/>
+          </a:ln>
+        </p:spPr>
+        <p:style>
+          <a:lnRef idx="2">
+            <a:schemeClr val="accent1">
+              <a:shade val="50000"/>
+            </a:schemeClr>
+          </a:lnRef>
+          <a:fillRef idx="1">
+            <a:schemeClr val="accent1"/>
+          </a:fillRef>
+          <a:effectRef idx="0">
+            <a:schemeClr val="accent1"/>
+          </a:effectRef>
+          <a:fontRef idx="minor">
+            <a:schemeClr val="lt1"/>
+          </a:fontRef>
+        </p:style>
+        <p:txBody>
+          <a:bodyPr rtlCol="0" anchor="ctr"/>
+          <a:lstStyle/>
+          <a:p>
+            <a:pPr algn="ctr"/>
+            <a:endParaRPr lang="en-US"/>
+          </a:p>
+        </p:txBody>
+      </p:sp>
+      <p:sp>
+        <p:nvSpPr>
+          <p:cNvPr id="2" name="Nadpis 1">
+            <a:extLst>
+              <a:ext uri="{FF2B5EF4-FFF2-40B4-BE49-F238E27FC236}">
+                <a16:creationId xmlns:a16="http://schemas.microsoft.com/office/drawing/2014/main" id="{B1BD57C7-7463-36C3-E213-CDE2F4615EAD}"/>
+              </a:ext>
+            </a:extLst>
+          </p:cNvPr>
+          <p:cNvSpPr>
+            <a:spLocks noGrp="1"/>
+          </p:cNvSpPr>
+          <p:nvPr>
+            <p:ph type="title"/>
+          </p:nvPr>
+        </p:nvSpPr>
+        <p:spPr>
+          <a:xfrm>
+            <a:off x="1001684" y="170412"/>
+            <a:ext cx="10178934" cy="1328730"/>
+          </a:xfrm>
+        </p:spPr>
+        <p:txBody>
+          <a:bodyPr vert="horz" lIns="91440" tIns="45720" rIns="91440" bIns="45720" rtlCol="0" anchor="b">
+            <a:normAutofit fontScale="90000"/>
+          </a:bodyPr>
+          <a:lstStyle/>
+          <a:p>
+            <a:pPr algn="ctr"/>
+            <a:r>
+              <a:rPr lang="en-US" sz="5200" kern="1200" dirty="0">
+                <a:solidFill>
+                  <a:schemeClr val="tx1"/>
+                </a:solidFill>
+                <a:latin typeface="+mj-lt"/>
+                <a:ea typeface="+mj-ea"/>
+                <a:cs typeface="+mj-cs"/>
+              </a:rPr>
+              <a:t>Layered Architecture – </a:t>
+            </a:r>
+            <a:r>
+              <a:rPr lang="en-US" sz="5200" dirty="0"/>
+              <a:t>Schedule Modification</a:t>
+            </a:r>
+            <a:endParaRPr lang="en-US" sz="5200" kern="1200" dirty="0">
+              <a:solidFill>
+                <a:schemeClr val="tx1"/>
+              </a:solidFill>
+              <a:latin typeface="+mj-lt"/>
+              <a:ea typeface="+mj-ea"/>
+              <a:cs typeface="+mj-cs"/>
+            </a:endParaRPr>
+          </a:p>
+        </p:txBody>
+      </p:sp>
+      <p:pic>
+        <p:nvPicPr>
+          <p:cNvPr id="3" name="Picture 2">
+            <a:extLst>
+              <a:ext uri="{FF2B5EF4-FFF2-40B4-BE49-F238E27FC236}">
+                <a16:creationId xmlns:a16="http://schemas.microsoft.com/office/drawing/2014/main" id="{9861C63C-ACAD-A011-90BC-A4C1537B7752}"/>
+              </a:ext>
+            </a:extLst>
+          </p:cNvPr>
+          <p:cNvPicPr>
+            <a:picLocks noChangeAspect="1"/>
+          </p:cNvPicPr>
+          <p:nvPr/>
+        </p:nvPicPr>
+        <p:blipFill>
+          <a:blip r:embed="rId2"/>
+          <a:stretch>
+            <a:fillRect/>
+          </a:stretch>
+        </p:blipFill>
+        <p:spPr>
+          <a:xfrm>
+            <a:off x="2179700" y="1340805"/>
+            <a:ext cx="7822902" cy="5346783"/>
+          </a:xfrm>
+          <a:prstGeom prst="rect">
+            <a:avLst/>
+          </a:prstGeom>
+        </p:spPr>
+      </p:pic>
+    </p:spTree>
+    <p:extLst>
+      <p:ext uri="{BB962C8B-B14F-4D97-AF65-F5344CB8AC3E}">
+        <p14:creationId xmlns:p14="http://schemas.microsoft.com/office/powerpoint/2010/main" val="1706801606"/>
+      </p:ext>
+    </p:extLst>
+  </p:cSld>
+  <p:clrMapOvr>
+    <a:masterClrMapping/>
+  </p:clrMapOvr>
+</p:sld>
+</file>
+
+<file path=ppt/slides/slide7.xml><?xml version="1.0" encoding="utf-8"?>
+<p:sld xmlns:a="http://schemas.openxmlformats.org/drawingml/2006/main" xmlns:r="http://schemas.openxmlformats.org/officeDocument/2006/relationships" xmlns:p="http://schemas.openxmlformats.org/presentationml/2006/main">
+  <p:cSld>
     <p:spTree>
       <p:nvGrpSpPr>
         <p:cNvPr id="1" name=""/>
@@ -3705,7 +4727,7 @@
 </p:sld>
 </file>
 
-<file path=ppt/slides/slide5.xml><?xml version="1.0" encoding="utf-8"?>
+<file path=ppt/slides/slide8.xml><?xml version="1.0" encoding="utf-8"?>
 <p:sld xmlns:a="http://schemas.openxmlformats.org/drawingml/2006/main" xmlns:r="http://schemas.openxmlformats.org/officeDocument/2006/relationships" xmlns:p="http://schemas.openxmlformats.org/presentationml/2006/main">
   <p:cSld>
     <p:spTree>
@@ -3784,7 +4806,7 @@
 </p:sld>
 </file>
 
-<file path=ppt/slides/slide6.xml><?xml version="1.0" encoding="utf-8"?>
+<file path=ppt/slides/slide9.xml><?xml version="1.0" encoding="utf-8"?>
 <p:sld xmlns:a="http://schemas.openxmlformats.org/drawingml/2006/main" xmlns:r="http://schemas.openxmlformats.org/officeDocument/2006/relationships" xmlns:p="http://schemas.openxmlformats.org/presentationml/2006/main">
   <p:cSld>
     <p:spTree>
@@ -3884,375 +4906,6 @@
     <p:extLst>
       <p:ext uri="{BB962C8B-B14F-4D97-AF65-F5344CB8AC3E}">
         <p14:creationId xmlns:p14="http://schemas.microsoft.com/office/powerpoint/2010/main" val="2559727546"/>
-      </p:ext>
-    </p:extLst>
-  </p:cSld>
-  <p:clrMapOvr>
-    <a:masterClrMapping/>
-  </p:clrMapOvr>
-</p:sld>
-</file>
-
-<file path=ppt/slides/slide7.xml><?xml version="1.0" encoding="utf-8"?>
-<p:sld xmlns:a="http://schemas.openxmlformats.org/drawingml/2006/main" xmlns:r="http://schemas.openxmlformats.org/officeDocument/2006/relationships" xmlns:p="http://schemas.openxmlformats.org/presentationml/2006/main">
-  <p:cSld>
-    <p:bg>
-      <p:bgPr>
-        <a:solidFill>
-          <a:schemeClr val="bg1"/>
-        </a:solidFill>
-        <a:effectLst/>
-      </p:bgPr>
-    </p:bg>
-    <p:spTree>
-      <p:nvGrpSpPr>
-        <p:cNvPr id="1" name="">
-          <a:extLst>
-            <a:ext uri="{FF2B5EF4-FFF2-40B4-BE49-F238E27FC236}">
-              <a16:creationId xmlns:a16="http://schemas.microsoft.com/office/drawing/2014/main" id="{F697EDE3-0F5B-102E-1075-373E086213EA}"/>
-            </a:ext>
-          </a:extLst>
-        </p:cNvPr>
-        <p:cNvGrpSpPr/>
-        <p:nvPr/>
-      </p:nvGrpSpPr>
-      <p:grpSpPr>
-        <a:xfrm>
-          <a:off x="0" y="0"/>
-          <a:ext cx="0" cy="0"/>
-          <a:chOff x="0" y="0"/>
-          <a:chExt cx="0" cy="0"/>
-        </a:xfrm>
-      </p:grpSpPr>
-      <p:sp useBgFill="1">
-        <p:nvSpPr>
-          <p:cNvPr id="14" name="Rectangle 13">
-            <a:extLst>
-              <a:ext uri="{FF2B5EF4-FFF2-40B4-BE49-F238E27FC236}">
-                <a16:creationId xmlns:a16="http://schemas.microsoft.com/office/drawing/2014/main" id="{022BDE4A-8A20-4A69-9C5A-581C82036A4D}"/>
-              </a:ext>
-              <a:ext uri="{C183D7F6-B498-43B3-948B-1728B52AA6E4}">
-                <adec:decorative xmlns:adec="http://schemas.microsoft.com/office/drawing/2017/decorative" val="1"/>
-              </a:ext>
-            </a:extLst>
-          </p:cNvPr>
-          <p:cNvSpPr>
-            <a:spLocks noGrp="1" noRot="1" noChangeAspect="1" noMove="1" noResize="1" noEditPoints="1" noAdjustHandles="1" noChangeArrowheads="1" noChangeShapeType="1" noTextEdit="1"/>
-          </p:cNvSpPr>
-          <p:nvPr>
-            <p:extLst>
-              <p:ext uri="{386F3935-93C4-4BCD-93E2-E3B085C9AB24}">
-                <p16:designElem xmlns:p16="http://schemas.microsoft.com/office/powerpoint/2015/main" val="1"/>
-              </p:ext>
-            </p:extLst>
-          </p:nvPr>
-        </p:nvSpPr>
-        <p:spPr>
-          <a:xfrm>
-            <a:off x="-1" y="0"/>
-            <a:ext cx="12188952" cy="6858000"/>
-          </a:xfrm>
-          <a:prstGeom prst="rect">
-            <a:avLst/>
-          </a:prstGeom>
-          <a:ln>
-            <a:noFill/>
-          </a:ln>
-        </p:spPr>
-        <p:style>
-          <a:lnRef idx="2">
-            <a:schemeClr val="accent1">
-              <a:shade val="50000"/>
-            </a:schemeClr>
-          </a:lnRef>
-          <a:fillRef idx="1">
-            <a:schemeClr val="accent1"/>
-          </a:fillRef>
-          <a:effectRef idx="0">
-            <a:schemeClr val="accent1"/>
-          </a:effectRef>
-          <a:fontRef idx="minor">
-            <a:schemeClr val="lt1"/>
-          </a:fontRef>
-        </p:style>
-        <p:txBody>
-          <a:bodyPr rtlCol="0" anchor="ctr"/>
-          <a:lstStyle/>
-          <a:p>
-            <a:pPr algn="ctr"/>
-            <a:endParaRPr lang="en-US"/>
-          </a:p>
-        </p:txBody>
-      </p:sp>
-      <p:sp>
-        <p:nvSpPr>
-          <p:cNvPr id="2" name="Nadpis 1">
-            <a:extLst>
-              <a:ext uri="{FF2B5EF4-FFF2-40B4-BE49-F238E27FC236}">
-                <a16:creationId xmlns:a16="http://schemas.microsoft.com/office/drawing/2014/main" id="{833D3A3F-DE7C-C301-BA9A-40CCD22C666D}"/>
-              </a:ext>
-            </a:extLst>
-          </p:cNvPr>
-          <p:cNvSpPr>
-            <a:spLocks noGrp="1"/>
-          </p:cNvSpPr>
-          <p:nvPr>
-            <p:ph type="title"/>
-          </p:nvPr>
-        </p:nvSpPr>
-        <p:spPr>
-          <a:xfrm>
-            <a:off x="1001684" y="170412"/>
-            <a:ext cx="10178934" cy="1328730"/>
-          </a:xfrm>
-        </p:spPr>
-        <p:txBody>
-          <a:bodyPr vert="horz" lIns="91440" tIns="45720" rIns="91440" bIns="45720" rtlCol="0" anchor="b">
-            <a:normAutofit/>
-          </a:bodyPr>
-          <a:lstStyle/>
-          <a:p>
-            <a:pPr algn="ctr"/>
-            <a:r>
-              <a:rPr lang="en-US" sz="5200" kern="1200">
-                <a:solidFill>
-                  <a:schemeClr val="tx1"/>
-                </a:solidFill>
-                <a:latin typeface="+mj-lt"/>
-                <a:ea typeface="+mj-ea"/>
-                <a:cs typeface="+mj-cs"/>
-              </a:rPr>
-              <a:t>L3 diagram – Office hours</a:t>
-            </a:r>
-          </a:p>
-        </p:txBody>
-      </p:sp>
-      <p:pic>
-        <p:nvPicPr>
-          <p:cNvPr id="9" name="Marcador de contenido 8">
-            <a:extLst>
-              <a:ext uri="{FF2B5EF4-FFF2-40B4-BE49-F238E27FC236}">
-                <a16:creationId xmlns:a16="http://schemas.microsoft.com/office/drawing/2014/main" id="{E2E043D0-5080-A83B-1219-A05981200FEB}"/>
-              </a:ext>
-            </a:extLst>
-          </p:cNvPr>
-          <p:cNvPicPr>
-            <a:picLocks noGrp="1" noChangeAspect="1"/>
-          </p:cNvPicPr>
-          <p:nvPr>
-            <p:ph idx="1"/>
-          </p:nvPr>
-        </p:nvPicPr>
-        <p:blipFill>
-          <a:blip r:embed="rId2"/>
-          <a:srcRect t="9692" r="-2" b="22075"/>
-          <a:stretch>
-            <a:fillRect/>
-          </a:stretch>
-        </p:blipFill>
-        <p:spPr>
-          <a:xfrm>
-            <a:off x="198741" y="2410448"/>
-            <a:ext cx="5803323" cy="3890357"/>
-          </a:xfrm>
-          <a:prstGeom prst="rect">
-            <a:avLst/>
-          </a:prstGeom>
-        </p:spPr>
-      </p:pic>
-      <p:pic>
-        <p:nvPicPr>
-          <p:cNvPr id="7" name="Imagen 6">
-            <a:extLst>
-              <a:ext uri="{FF2B5EF4-FFF2-40B4-BE49-F238E27FC236}">
-                <a16:creationId xmlns:a16="http://schemas.microsoft.com/office/drawing/2014/main" id="{0FBF5F8E-8772-5A2D-7036-36CC5F7A5DDC}"/>
-              </a:ext>
-            </a:extLst>
-          </p:cNvPr>
-          <p:cNvPicPr>
-            <a:picLocks noChangeAspect="1"/>
-          </p:cNvPicPr>
-          <p:nvPr/>
-        </p:nvPicPr>
-        <p:blipFill>
-          <a:blip r:embed="rId3"/>
-          <a:srcRect t="27300" r="-1" b="23260"/>
-          <a:stretch>
-            <a:fillRect/>
-          </a:stretch>
-        </p:blipFill>
-        <p:spPr>
-          <a:xfrm>
-            <a:off x="6189934" y="2410448"/>
-            <a:ext cx="5803323" cy="3890357"/>
-          </a:xfrm>
-          <a:prstGeom prst="rect">
-            <a:avLst/>
-          </a:prstGeom>
-        </p:spPr>
-      </p:pic>
-    </p:spTree>
-    <p:extLst>
-      <p:ext uri="{BB962C8B-B14F-4D97-AF65-F5344CB8AC3E}">
-        <p14:creationId xmlns:p14="http://schemas.microsoft.com/office/powerpoint/2010/main" val="2948255022"/>
-      </p:ext>
-    </p:extLst>
-  </p:cSld>
-  <p:clrMapOvr>
-    <a:masterClrMapping/>
-  </p:clrMapOvr>
-</p:sld>
-</file>
-
-<file path=ppt/slides/slide8.xml><?xml version="1.0" encoding="utf-8"?>
-<p:sld xmlns:a="http://schemas.openxmlformats.org/drawingml/2006/main" xmlns:r="http://schemas.openxmlformats.org/officeDocument/2006/relationships" xmlns:p="http://schemas.openxmlformats.org/presentationml/2006/main">
-  <p:cSld>
-    <p:spTree>
-      <p:nvGrpSpPr>
-        <p:cNvPr id="1" name=""/>
-        <p:cNvGrpSpPr/>
-        <p:nvPr/>
-      </p:nvGrpSpPr>
-      <p:grpSpPr>
-        <a:xfrm>
-          <a:off x="0" y="0"/>
-          <a:ext cx="0" cy="0"/>
-          <a:chOff x="0" y="0"/>
-          <a:chExt cx="0" cy="0"/>
-        </a:xfrm>
-      </p:grpSpPr>
-      <p:sp>
-        <p:nvSpPr>
-          <p:cNvPr id="2" name="Nadpis 1"/>
-          <p:cNvSpPr>
-            <a:spLocks noGrp="1"/>
-          </p:cNvSpPr>
-          <p:nvPr>
-            <p:ph type="title"/>
-          </p:nvPr>
-        </p:nvSpPr>
-        <p:spPr/>
-        <p:txBody>
-          <a:bodyPr/>
-          <a:lstStyle/>
-          <a:p>
-            <a:r>
-              <a:rPr lang="en-US" dirty="0"/>
-              <a:t>Dynamic diagram – Office hours</a:t>
-            </a:r>
-            <a:endParaRPr lang="cs-CZ" dirty="0"/>
-          </a:p>
-        </p:txBody>
-      </p:sp>
-      <p:pic>
-        <p:nvPicPr>
-          <p:cNvPr id="4" name="Zástupný symbol pro obsah 3"/>
-          <p:cNvPicPr>
-            <a:picLocks noGrp="1" noChangeAspect="1"/>
-          </p:cNvPicPr>
-          <p:nvPr>
-            <p:ph idx="1"/>
-          </p:nvPr>
-        </p:nvPicPr>
-        <p:blipFill>
-          <a:blip r:embed="rId2"/>
-          <a:stretch>
-            <a:fillRect/>
-          </a:stretch>
-        </p:blipFill>
-        <p:spPr>
-          <a:xfrm>
-            <a:off x="1015482" y="1322761"/>
-            <a:ext cx="10161036" cy="5535239"/>
-          </a:xfrm>
-          <a:prstGeom prst="rect">
-            <a:avLst/>
-          </a:prstGeom>
-        </p:spPr>
-      </p:pic>
-    </p:spTree>
-    <p:extLst>
-      <p:ext uri="{BB962C8B-B14F-4D97-AF65-F5344CB8AC3E}">
-        <p14:creationId xmlns:p14="http://schemas.microsoft.com/office/powerpoint/2010/main" val="156025415"/>
-      </p:ext>
-    </p:extLst>
-  </p:cSld>
-  <p:clrMapOvr>
-    <a:masterClrMapping/>
-  </p:clrMapOvr>
-</p:sld>
-</file>
-
-<file path=ppt/slides/slide9.xml><?xml version="1.0" encoding="utf-8"?>
-<p:sld xmlns:a="http://schemas.openxmlformats.org/drawingml/2006/main" xmlns:r="http://schemas.openxmlformats.org/officeDocument/2006/relationships" xmlns:p="http://schemas.openxmlformats.org/presentationml/2006/main">
-  <p:cSld>
-    <p:spTree>
-      <p:nvGrpSpPr>
-        <p:cNvPr id="1" name=""/>
-        <p:cNvGrpSpPr/>
-        <p:nvPr/>
-      </p:nvGrpSpPr>
-      <p:grpSpPr>
-        <a:xfrm>
-          <a:off x="0" y="0"/>
-          <a:ext cx="0" cy="0"/>
-          <a:chOff x="0" y="0"/>
-          <a:chExt cx="0" cy="0"/>
-        </a:xfrm>
-      </p:grpSpPr>
-      <p:sp>
-        <p:nvSpPr>
-          <p:cNvPr id="2" name="Nadpis 1"/>
-          <p:cNvSpPr>
-            <a:spLocks noGrp="1"/>
-          </p:cNvSpPr>
-          <p:nvPr>
-            <p:ph type="title"/>
-          </p:nvPr>
-        </p:nvSpPr>
-        <p:spPr/>
-        <p:txBody>
-          <a:bodyPr/>
-          <a:lstStyle/>
-          <a:p>
-            <a:r>
-              <a:rPr lang="en-US" dirty="0"/>
-              <a:t>Deployment diagram(Martin)</a:t>
-            </a:r>
-            <a:endParaRPr lang="cs-CZ" dirty="0"/>
-          </a:p>
-        </p:txBody>
-      </p:sp>
-      <p:pic>
-        <p:nvPicPr>
-          <p:cNvPr id="4" name="Zástupný symbol pro obsah 3"/>
-          <p:cNvPicPr>
-            <a:picLocks noGrp="1" noChangeAspect="1"/>
-          </p:cNvPicPr>
-          <p:nvPr>
-            <p:ph idx="1"/>
-          </p:nvPr>
-        </p:nvPicPr>
-        <p:blipFill>
-          <a:blip r:embed="rId2"/>
-          <a:stretch>
-            <a:fillRect/>
-          </a:stretch>
-        </p:blipFill>
-        <p:spPr>
-          <a:xfrm>
-            <a:off x="0" y="2005263"/>
-            <a:ext cx="12192000" cy="4034589"/>
-          </a:xfrm>
-          <a:prstGeom prst="rect">
-            <a:avLst/>
-          </a:prstGeom>
-        </p:spPr>
-      </p:pic>
-    </p:spTree>
-    <p:extLst>
-      <p:ext uri="{BB962C8B-B14F-4D97-AF65-F5344CB8AC3E}">
-        <p14:creationId xmlns:p14="http://schemas.microsoft.com/office/powerpoint/2010/main" val="1413589051"/>
       </p:ext>
     </p:extLst>
   </p:cSld>

--- a/Schedules 1.pptx
+++ b/Schedules 1.pptx
@@ -14069,7 +14069,7 @@
               </a:rPr>
               <a:t>Core Features</a:t>
             </a:r>
-            <a:endParaRPr lang="cs-CZ" sz="8000" b="1">
+            <a:endParaRPr lang="cs-CZ" sz="8000" b="1" dirty="0">
               <a:latin typeface="+mn-lt"/>
             </a:endParaRPr>
           </a:p>
